--- a/assets/slides/lecture-16-slides.pptx
+++ b/assets/slides/lecture-16-slides.pptx
@@ -5,20 +5,21 @@
     <p:sldMasterId id="2147483648" r:id="rId1"/>
   </p:sldMasterIdLst>
   <p:notesMasterIdLst>
-    <p:notesMasterId r:id="rId13"/>
+    <p:notesMasterId r:id="rId14"/>
   </p:notesMasterIdLst>
   <p:sldIdLst>
     <p:sldId id="256" r:id="rId2"/>
     <p:sldId id="267" r:id="rId3"/>
     <p:sldId id="258" r:id="rId4"/>
     <p:sldId id="266" r:id="rId5"/>
-    <p:sldId id="259" r:id="rId6"/>
-    <p:sldId id="269" r:id="rId7"/>
-    <p:sldId id="272" r:id="rId8"/>
-    <p:sldId id="270" r:id="rId9"/>
-    <p:sldId id="271" r:id="rId10"/>
-    <p:sldId id="263" r:id="rId11"/>
-    <p:sldId id="265" r:id="rId12"/>
+    <p:sldId id="273" r:id="rId6"/>
+    <p:sldId id="259" r:id="rId7"/>
+    <p:sldId id="269" r:id="rId8"/>
+    <p:sldId id="272" r:id="rId9"/>
+    <p:sldId id="270" r:id="rId10"/>
+    <p:sldId id="271" r:id="rId11"/>
+    <p:sldId id="263" r:id="rId12"/>
+    <p:sldId id="265" r:id="rId13"/>
   </p:sldIdLst>
   <p:sldSz cx="12192000" cy="6858000"/>
   <p:notesSz cx="6858000" cy="9144000"/>
@@ -336,6 +337,103 @@
   <p:cSld>
     <p:spTree>
       <p:nvGrpSpPr>
+        <p:cNvPr id="1" name="">
+          <a:extLst>
+            <a:ext uri="{FF2B5EF4-FFF2-40B4-BE49-F238E27FC236}">
+              <a16:creationId xmlns:a16="http://schemas.microsoft.com/office/drawing/2014/main" id="{16AC3C6C-D247-8DAF-6116-A25514E7E1AC}"/>
+            </a:ext>
+          </a:extLst>
+        </p:cNvPr>
+        <p:cNvGrpSpPr/>
+        <p:nvPr/>
+      </p:nvGrpSpPr>
+      <p:grpSpPr>
+        <a:xfrm>
+          <a:off x="0" y="0"/>
+          <a:ext cx="0" cy="0"/>
+          <a:chOff x="0" y="0"/>
+          <a:chExt cx="0" cy="0"/>
+        </a:xfrm>
+      </p:grpSpPr>
+      <p:sp>
+        <p:nvSpPr>
+          <p:cNvPr id="2" name="Slide Image Placeholder 1">
+            <a:extLst>
+              <a:ext uri="{FF2B5EF4-FFF2-40B4-BE49-F238E27FC236}">
+                <a16:creationId xmlns:a16="http://schemas.microsoft.com/office/drawing/2014/main" id="{FFC128B4-BC01-584E-93E0-43EE22FCEED4}"/>
+              </a:ext>
+            </a:extLst>
+          </p:cNvPr>
+          <p:cNvSpPr>
+            <a:spLocks noGrp="1" noRot="1" noChangeAspect="1"/>
+          </p:cNvSpPr>
+          <p:nvPr>
+            <p:ph type="sldImg" idx="2"/>
+          </p:nvPr>
+        </p:nvSpPr>
+        <p:spPr/>
+      </p:sp>
+      <p:sp>
+        <p:nvSpPr>
+          <p:cNvPr id="3" name="Notes Placeholder 2">
+            <a:extLst>
+              <a:ext uri="{FF2B5EF4-FFF2-40B4-BE49-F238E27FC236}">
+                <a16:creationId xmlns:a16="http://schemas.microsoft.com/office/drawing/2014/main" id="{D51C7594-A00C-1F86-E4EE-87F729851FDB}"/>
+              </a:ext>
+            </a:extLst>
+          </p:cNvPr>
+          <p:cNvSpPr>
+            <a:spLocks noGrp="1"/>
+          </p:cNvSpPr>
+          <p:nvPr>
+            <p:ph type="body" sz="quarter" idx="3"/>
+          </p:nvPr>
+        </p:nvSpPr>
+        <p:spPr/>
+        <p:txBody>
+          <a:bodyPr/>
+          <a:lstStyle/>
+          <a:p>
+            <a:endParaRPr dirty="0"/>
+          </a:p>
+        </p:txBody>
+      </p:sp>
+      <p:sp>
+        <p:nvSpPr>
+          <p:cNvPr id="4" name="Slide Number Placeholder 3">
+            <a:extLst>
+              <a:ext uri="{FF2B5EF4-FFF2-40B4-BE49-F238E27FC236}">
+                <a16:creationId xmlns:a16="http://schemas.microsoft.com/office/drawing/2014/main" id="{B496F7F5-52DF-0E4F-6AD3-12D24C520AAC}"/>
+              </a:ext>
+            </a:extLst>
+          </p:cNvPr>
+          <p:cNvSpPr>
+            <a:spLocks noGrp="1"/>
+          </p:cNvSpPr>
+          <p:nvPr>
+            <p:ph type="sldNum" sz="quarter" idx="5"/>
+          </p:nvPr>
+        </p:nvSpPr>
+        <p:spPr/>
+      </p:sp>
+    </p:spTree>
+    <p:extLst>
+      <p:ext uri="{BB962C8B-B14F-4D97-AF65-F5344CB8AC3E}">
+        <p14:creationId xmlns:p14="http://schemas.microsoft.com/office/powerpoint/2010/main" val="1113781213"/>
+      </p:ext>
+    </p:extLst>
+  </p:cSld>
+  <p:clrMapOvr>
+    <a:masterClrMapping/>
+  </p:clrMapOvr>
+</p:notes>
+</file>
+
+<file path=ppt/notesSlides/notesSlide11.xml><?xml version="1.0" encoding="utf-8"?>
+<p:notes xmlns:a="http://schemas.openxmlformats.org/drawingml/2006/main" xmlns:r="http://schemas.openxmlformats.org/officeDocument/2006/relationships" xmlns:p="http://schemas.openxmlformats.org/presentationml/2006/main">
+  <p:cSld>
+    <p:spTree>
+      <p:nvGrpSpPr>
         <p:cNvPr id="1" name=""/>
         <p:cNvGrpSpPr/>
         <p:nvPr/>
@@ -399,7 +497,7 @@
 </p:notes>
 </file>
 
-<file path=ppt/notesSlides/notesSlide11.xml><?xml version="1.0" encoding="utf-8"?>
+<file path=ppt/notesSlides/notesSlide12.xml><?xml version="1.0" encoding="utf-8"?>
 <p:notes xmlns:a="http://schemas.openxmlformats.org/drawingml/2006/main" xmlns:r="http://schemas.openxmlformats.org/officeDocument/2006/relationships" xmlns:p="http://schemas.openxmlformats.org/presentationml/2006/main">
   <p:cSld>
     <p:spTree>
@@ -705,6 +803,115 @@
   <p:cSld>
     <p:spTree>
       <p:nvGrpSpPr>
+        <p:cNvPr id="1" name="">
+          <a:extLst>
+            <a:ext uri="{FF2B5EF4-FFF2-40B4-BE49-F238E27FC236}">
+              <a16:creationId xmlns:a16="http://schemas.microsoft.com/office/drawing/2014/main" id="{BFDBB08C-7403-DD77-CA5D-B3E37BC90EEE}"/>
+            </a:ext>
+          </a:extLst>
+        </p:cNvPr>
+        <p:cNvGrpSpPr/>
+        <p:nvPr/>
+      </p:nvGrpSpPr>
+      <p:grpSpPr>
+        <a:xfrm>
+          <a:off x="0" y="0"/>
+          <a:ext cx="0" cy="0"/>
+          <a:chOff x="0" y="0"/>
+          <a:chExt cx="0" cy="0"/>
+        </a:xfrm>
+      </p:grpSpPr>
+      <p:sp>
+        <p:nvSpPr>
+          <p:cNvPr id="2" name="Slide Image Placeholder 1">
+            <a:extLst>
+              <a:ext uri="{FF2B5EF4-FFF2-40B4-BE49-F238E27FC236}">
+                <a16:creationId xmlns:a16="http://schemas.microsoft.com/office/drawing/2014/main" id="{D6AFE58C-1D8C-1D9C-DA95-9F63A5439073}"/>
+              </a:ext>
+            </a:extLst>
+          </p:cNvPr>
+          <p:cNvSpPr>
+            <a:spLocks noGrp="1" noRot="1" noChangeAspect="1"/>
+          </p:cNvSpPr>
+          <p:nvPr>
+            <p:ph type="sldImg" idx="2"/>
+          </p:nvPr>
+        </p:nvSpPr>
+        <p:spPr/>
+      </p:sp>
+      <p:sp>
+        <p:nvSpPr>
+          <p:cNvPr id="3" name="Notes Placeholder 2">
+            <a:extLst>
+              <a:ext uri="{FF2B5EF4-FFF2-40B4-BE49-F238E27FC236}">
+                <a16:creationId xmlns:a16="http://schemas.microsoft.com/office/drawing/2014/main" id="{79288ADE-2450-14D5-2F79-12B633C5CB58}"/>
+              </a:ext>
+            </a:extLst>
+          </p:cNvPr>
+          <p:cNvSpPr>
+            <a:spLocks noGrp="1"/>
+          </p:cNvSpPr>
+          <p:nvPr>
+            <p:ph type="body" sz="quarter" idx="3"/>
+          </p:nvPr>
+        </p:nvSpPr>
+        <p:spPr/>
+        <p:txBody>
+          <a:bodyPr/>
+          <a:lstStyle/>
+          <a:p>
+            <a:r>
+              <a:rPr lang="en-US" dirty="0"/>
+              <a:t>Imagine a digital signal carrying 1,000 bits per second. Each bit lasts 1 </a:t>
+            </a:r>
+            <a:r>
+              <a:rPr lang="en-US" dirty="0" err="1"/>
+              <a:t>ms</a:t>
+            </a:r>
+            <a:r>
+              <a:rPr lang="en-US" dirty="0"/>
+              <a:t>, but the receiver still needs to locate those bit intervals.</a:t>
+            </a:r>
+            <a:endParaRPr dirty="0"/>
+          </a:p>
+        </p:txBody>
+      </p:sp>
+      <p:sp>
+        <p:nvSpPr>
+          <p:cNvPr id="4" name="Slide Number Placeholder 3">
+            <a:extLst>
+              <a:ext uri="{FF2B5EF4-FFF2-40B4-BE49-F238E27FC236}">
+                <a16:creationId xmlns:a16="http://schemas.microsoft.com/office/drawing/2014/main" id="{656FBF50-F3FA-E306-4DAE-2464730F78E3}"/>
+              </a:ext>
+            </a:extLst>
+          </p:cNvPr>
+          <p:cNvSpPr>
+            <a:spLocks noGrp="1"/>
+          </p:cNvSpPr>
+          <p:nvPr>
+            <p:ph type="sldNum" sz="quarter" idx="5"/>
+          </p:nvPr>
+        </p:nvSpPr>
+        <p:spPr/>
+      </p:sp>
+    </p:spTree>
+    <p:extLst>
+      <p:ext uri="{BB962C8B-B14F-4D97-AF65-F5344CB8AC3E}">
+        <p14:creationId xmlns:p14="http://schemas.microsoft.com/office/powerpoint/2010/main" val="1609616948"/>
+      </p:ext>
+    </p:extLst>
+  </p:cSld>
+  <p:clrMapOvr>
+    <a:masterClrMapping/>
+  </p:clrMapOvr>
+</p:notes>
+</file>
+
+<file path=ppt/notesSlides/notesSlide6.xml><?xml version="1.0" encoding="utf-8"?>
+<p:notes xmlns:a="http://schemas.openxmlformats.org/drawingml/2006/main" xmlns:r="http://schemas.openxmlformats.org/officeDocument/2006/relationships" xmlns:p="http://schemas.openxmlformats.org/presentationml/2006/main">
+  <p:cSld>
+    <p:spTree>
+      <p:nvGrpSpPr>
         <p:cNvPr id="1" name=""/>
         <p:cNvGrpSpPr/>
         <p:nvPr/>
@@ -780,7 +987,7 @@
 </p:notes>
 </file>
 
-<file path=ppt/notesSlides/notesSlide6.xml><?xml version="1.0" encoding="utf-8"?>
+<file path=ppt/notesSlides/notesSlide7.xml><?xml version="1.0" encoding="utf-8"?>
 <p:notes xmlns:a="http://schemas.openxmlformats.org/drawingml/2006/main" xmlns:r="http://schemas.openxmlformats.org/officeDocument/2006/relationships" xmlns:p="http://schemas.openxmlformats.org/presentationml/2006/main">
   <p:cSld>
     <p:spTree>
@@ -889,7 +1096,7 @@
 </p:notes>
 </file>
 
-<file path=ppt/notesSlides/notesSlide7.xml><?xml version="1.0" encoding="utf-8"?>
+<file path=ppt/notesSlides/notesSlide8.xml><?xml version="1.0" encoding="utf-8"?>
 <p:notes xmlns:a="http://schemas.openxmlformats.org/drawingml/2006/main" xmlns:r="http://schemas.openxmlformats.org/officeDocument/2006/relationships" xmlns:p="http://schemas.openxmlformats.org/presentationml/2006/main">
   <p:cSld>
     <p:spTree>
@@ -986,7 +1193,7 @@
 </p:notes>
 </file>
 
-<file path=ppt/notesSlides/notesSlide8.xml><?xml version="1.0" encoding="utf-8"?>
+<file path=ppt/notesSlides/notesSlide9.xml><?xml version="1.0" encoding="utf-8"?>
 <p:notes xmlns:a="http://schemas.openxmlformats.org/drawingml/2006/main" xmlns:r="http://schemas.openxmlformats.org/officeDocument/2006/relationships" xmlns:p="http://schemas.openxmlformats.org/presentationml/2006/main">
   <p:cSld>
     <p:spTree>
@@ -1074,103 +1281,6 @@
     <p:extLst>
       <p:ext uri="{BB962C8B-B14F-4D97-AF65-F5344CB8AC3E}">
         <p14:creationId xmlns:p14="http://schemas.microsoft.com/office/powerpoint/2010/main" val="891982575"/>
-      </p:ext>
-    </p:extLst>
-  </p:cSld>
-  <p:clrMapOvr>
-    <a:masterClrMapping/>
-  </p:clrMapOvr>
-</p:notes>
-</file>
-
-<file path=ppt/notesSlides/notesSlide9.xml><?xml version="1.0" encoding="utf-8"?>
-<p:notes xmlns:a="http://schemas.openxmlformats.org/drawingml/2006/main" xmlns:r="http://schemas.openxmlformats.org/officeDocument/2006/relationships" xmlns:p="http://schemas.openxmlformats.org/presentationml/2006/main">
-  <p:cSld>
-    <p:spTree>
-      <p:nvGrpSpPr>
-        <p:cNvPr id="1" name="">
-          <a:extLst>
-            <a:ext uri="{FF2B5EF4-FFF2-40B4-BE49-F238E27FC236}">
-              <a16:creationId xmlns:a16="http://schemas.microsoft.com/office/drawing/2014/main" id="{16AC3C6C-D247-8DAF-6116-A25514E7E1AC}"/>
-            </a:ext>
-          </a:extLst>
-        </p:cNvPr>
-        <p:cNvGrpSpPr/>
-        <p:nvPr/>
-      </p:nvGrpSpPr>
-      <p:grpSpPr>
-        <a:xfrm>
-          <a:off x="0" y="0"/>
-          <a:ext cx="0" cy="0"/>
-          <a:chOff x="0" y="0"/>
-          <a:chExt cx="0" cy="0"/>
-        </a:xfrm>
-      </p:grpSpPr>
-      <p:sp>
-        <p:nvSpPr>
-          <p:cNvPr id="2" name="Slide Image Placeholder 1">
-            <a:extLst>
-              <a:ext uri="{FF2B5EF4-FFF2-40B4-BE49-F238E27FC236}">
-                <a16:creationId xmlns:a16="http://schemas.microsoft.com/office/drawing/2014/main" id="{FFC128B4-BC01-584E-93E0-43EE22FCEED4}"/>
-              </a:ext>
-            </a:extLst>
-          </p:cNvPr>
-          <p:cNvSpPr>
-            <a:spLocks noGrp="1" noRot="1" noChangeAspect="1"/>
-          </p:cNvSpPr>
-          <p:nvPr>
-            <p:ph type="sldImg" idx="2"/>
-          </p:nvPr>
-        </p:nvSpPr>
-        <p:spPr/>
-      </p:sp>
-      <p:sp>
-        <p:nvSpPr>
-          <p:cNvPr id="3" name="Notes Placeholder 2">
-            <a:extLst>
-              <a:ext uri="{FF2B5EF4-FFF2-40B4-BE49-F238E27FC236}">
-                <a16:creationId xmlns:a16="http://schemas.microsoft.com/office/drawing/2014/main" id="{D51C7594-A00C-1F86-E4EE-87F729851FDB}"/>
-              </a:ext>
-            </a:extLst>
-          </p:cNvPr>
-          <p:cNvSpPr>
-            <a:spLocks noGrp="1"/>
-          </p:cNvSpPr>
-          <p:nvPr>
-            <p:ph type="body" sz="quarter" idx="3"/>
-          </p:nvPr>
-        </p:nvSpPr>
-        <p:spPr/>
-        <p:txBody>
-          <a:bodyPr/>
-          <a:lstStyle/>
-          <a:p>
-            <a:endParaRPr dirty="0"/>
-          </a:p>
-        </p:txBody>
-      </p:sp>
-      <p:sp>
-        <p:nvSpPr>
-          <p:cNvPr id="4" name="Slide Number Placeholder 3">
-            <a:extLst>
-              <a:ext uri="{FF2B5EF4-FFF2-40B4-BE49-F238E27FC236}">
-                <a16:creationId xmlns:a16="http://schemas.microsoft.com/office/drawing/2014/main" id="{B496F7F5-52DF-0E4F-6AD3-12D24C520AAC}"/>
-              </a:ext>
-            </a:extLst>
-          </p:cNvPr>
-          <p:cNvSpPr>
-            <a:spLocks noGrp="1"/>
-          </p:cNvSpPr>
-          <p:nvPr>
-            <p:ph type="sldNum" sz="quarter" idx="5"/>
-          </p:nvPr>
-        </p:nvSpPr>
-        <p:spPr/>
-      </p:sp>
-    </p:spTree>
-    <p:extLst>
-      <p:ext uri="{BB962C8B-B14F-4D97-AF65-F5344CB8AC3E}">
-        <p14:creationId xmlns:p14="http://schemas.microsoft.com/office/powerpoint/2010/main" val="1113781213"/>
       </p:ext>
     </p:extLst>
   </p:cSld>
@@ -1359,7 +1469,7 @@
           <a:p>
             <a:fld id="{5BCAD085-E8A6-8845-BD4E-CB4CCA059FC4}" type="datetimeFigureOut">
               <a:rPr lang="en-US" smtClean="0"/>
-              <a:t>10/12/2026</a:t>
+              <a:t>10/13/2026</a:t>
             </a:fld>
             <a:endParaRPr lang="en-US"/>
           </a:p>
@@ -1527,7 +1637,7 @@
           <a:p>
             <a:fld id="{5BCAD085-E8A6-8845-BD4E-CB4CCA059FC4}" type="datetimeFigureOut">
               <a:rPr lang="en-US" smtClean="0"/>
-              <a:t>10/12/2026</a:t>
+              <a:t>10/13/2026</a:t>
             </a:fld>
             <a:endParaRPr lang="en-US"/>
           </a:p>
@@ -1705,7 +1815,7 @@
           <a:p>
             <a:fld id="{5BCAD085-E8A6-8845-BD4E-CB4CCA059FC4}" type="datetimeFigureOut">
               <a:rPr lang="en-US" smtClean="0"/>
-              <a:t>10/12/2026</a:t>
+              <a:t>10/13/2026</a:t>
             </a:fld>
             <a:endParaRPr lang="en-US"/>
           </a:p>
@@ -1873,7 +1983,7 @@
           <a:p>
             <a:fld id="{5BCAD085-E8A6-8845-BD4E-CB4CCA059FC4}" type="datetimeFigureOut">
               <a:rPr lang="en-US" smtClean="0"/>
-              <a:t>10/12/2026</a:t>
+              <a:t>10/13/2026</a:t>
             </a:fld>
             <a:endParaRPr lang="en-US"/>
           </a:p>
@@ -2118,7 +2228,7 @@
           <a:p>
             <a:fld id="{5BCAD085-E8A6-8845-BD4E-CB4CCA059FC4}" type="datetimeFigureOut">
               <a:rPr lang="en-US" smtClean="0"/>
-              <a:t>10/12/2026</a:t>
+              <a:t>10/13/2026</a:t>
             </a:fld>
             <a:endParaRPr lang="en-US"/>
           </a:p>
@@ -2403,7 +2513,7 @@
           <a:p>
             <a:fld id="{5BCAD085-E8A6-8845-BD4E-CB4CCA059FC4}" type="datetimeFigureOut">
               <a:rPr lang="en-US" smtClean="0"/>
-              <a:t>10/12/2026</a:t>
+              <a:t>10/13/2026</a:t>
             </a:fld>
             <a:endParaRPr lang="en-US"/>
           </a:p>
@@ -2822,7 +2932,7 @@
           <a:p>
             <a:fld id="{5BCAD085-E8A6-8845-BD4E-CB4CCA059FC4}" type="datetimeFigureOut">
               <a:rPr lang="en-US" smtClean="0"/>
-              <a:t>10/12/2026</a:t>
+              <a:t>10/13/2026</a:t>
             </a:fld>
             <a:endParaRPr lang="en-US"/>
           </a:p>
@@ -2939,7 +3049,7 @@
           <a:p>
             <a:fld id="{5BCAD085-E8A6-8845-BD4E-CB4CCA059FC4}" type="datetimeFigureOut">
               <a:rPr lang="en-US" smtClean="0"/>
-              <a:t>10/12/2026</a:t>
+              <a:t>10/13/2026</a:t>
             </a:fld>
             <a:endParaRPr lang="en-US"/>
           </a:p>
@@ -3034,7 +3144,7 @@
           <a:p>
             <a:fld id="{5BCAD085-E8A6-8845-BD4E-CB4CCA059FC4}" type="datetimeFigureOut">
               <a:rPr lang="en-US" smtClean="0"/>
-              <a:t>10/12/2026</a:t>
+              <a:t>10/13/2026</a:t>
             </a:fld>
             <a:endParaRPr lang="en-US"/>
           </a:p>
@@ -3309,7 +3419,7 @@
           <a:p>
             <a:fld id="{5BCAD085-E8A6-8845-BD4E-CB4CCA059FC4}" type="datetimeFigureOut">
               <a:rPr lang="en-US" smtClean="0"/>
-              <a:t>10/12/2026</a:t>
+              <a:t>10/13/2026</a:t>
             </a:fld>
             <a:endParaRPr lang="en-US"/>
           </a:p>
@@ -3561,7 +3671,7 @@
           <a:p>
             <a:fld id="{5BCAD085-E8A6-8845-BD4E-CB4CCA059FC4}" type="datetimeFigureOut">
               <a:rPr lang="en-US" smtClean="0"/>
-              <a:t>10/12/2026</a:t>
+              <a:t>10/13/2026</a:t>
             </a:fld>
             <a:endParaRPr lang="en-US"/>
           </a:p>
@@ -3772,7 +3882,7 @@
           <a:p>
             <a:fld id="{5BCAD085-E8A6-8845-BD4E-CB4CCA059FC4}" type="datetimeFigureOut">
               <a:rPr lang="en-US" smtClean="0"/>
-              <a:t>10/12/2026</a:t>
+              <a:t>10/13/2026</a:t>
             </a:fld>
             <a:endParaRPr lang="en-US"/>
           </a:p>
@@ -4929,6 +5039,757 @@
     </p:bg>
     <p:spTree>
       <p:nvGrpSpPr>
+        <p:cNvPr id="1" name="">
+          <a:extLst>
+            <a:ext uri="{FF2B5EF4-FFF2-40B4-BE49-F238E27FC236}">
+              <a16:creationId xmlns:a16="http://schemas.microsoft.com/office/drawing/2014/main" id="{9938D679-40EE-965D-F59A-BE9808CC2CE2}"/>
+            </a:ext>
+          </a:extLst>
+        </p:cNvPr>
+        <p:cNvGrpSpPr/>
+        <p:nvPr/>
+      </p:nvGrpSpPr>
+      <p:grpSpPr>
+        <a:xfrm>
+          <a:off x="0" y="0"/>
+          <a:ext cx="0" cy="0"/>
+          <a:chOff x="0" y="0"/>
+          <a:chExt cx="0" cy="0"/>
+        </a:xfrm>
+      </p:grpSpPr>
+      <p:sp>
+        <p:nvSpPr>
+          <p:cNvPr id="2" name="Rectangle 1">
+            <a:extLst>
+              <a:ext uri="{FF2B5EF4-FFF2-40B4-BE49-F238E27FC236}">
+                <a16:creationId xmlns:a16="http://schemas.microsoft.com/office/drawing/2014/main" id="{2267E10D-8F26-54A6-088D-9EFEB6BBDB41}"/>
+              </a:ext>
+            </a:extLst>
+          </p:cNvPr>
+          <p:cNvSpPr/>
+          <p:nvPr/>
+        </p:nvSpPr>
+        <p:spPr>
+          <a:xfrm>
+            <a:off x="0" y="0"/>
+            <a:ext cx="164592" cy="6858000"/>
+          </a:xfrm>
+          <a:prstGeom prst="rect">
+            <a:avLst/>
+          </a:prstGeom>
+          <a:solidFill>
+            <a:srgbClr val="0F6D74"/>
+          </a:solidFill>
+          <a:ln>
+            <a:noFill/>
+          </a:ln>
+        </p:spPr>
+        <p:style>
+          <a:lnRef idx="1">
+            <a:schemeClr val="accent1"/>
+          </a:lnRef>
+          <a:fillRef idx="3">
+            <a:schemeClr val="accent1"/>
+          </a:fillRef>
+          <a:effectRef idx="2">
+            <a:schemeClr val="accent1"/>
+          </a:effectRef>
+          <a:fontRef idx="minor">
+            <a:schemeClr val="lt1"/>
+          </a:fontRef>
+        </p:style>
+        <p:txBody>
+          <a:bodyPr rtlCol="0" anchor="ctr"/>
+          <a:lstStyle/>
+          <a:p>
+            <a:pPr algn="ctr"/>
+            <a:endParaRPr/>
+          </a:p>
+        </p:txBody>
+      </p:sp>
+      <p:cxnSp>
+        <p:nvCxnSpPr>
+          <p:cNvPr id="3" name="Connector 2">
+            <a:extLst>
+              <a:ext uri="{FF2B5EF4-FFF2-40B4-BE49-F238E27FC236}">
+                <a16:creationId xmlns:a16="http://schemas.microsoft.com/office/drawing/2014/main" id="{4510518E-8FBB-76A1-F12F-17C124DFDDC4}"/>
+              </a:ext>
+            </a:extLst>
+          </p:cNvPr>
+          <p:cNvCxnSpPr/>
+          <p:nvPr/>
+        </p:nvCxnSpPr>
+        <p:spPr>
+          <a:xfrm>
+            <a:off x="10698480" y="384048"/>
+            <a:ext cx="960120" cy="0"/>
+          </a:xfrm>
+          <a:prstGeom prst="line">
+            <a:avLst/>
+          </a:prstGeom>
+          <a:ln w="8890">
+            <a:solidFill>
+              <a:srgbClr val="CCD1D0"/>
+            </a:solidFill>
+          </a:ln>
+        </p:spPr>
+        <p:style>
+          <a:lnRef idx="2">
+            <a:schemeClr val="accent1"/>
+          </a:lnRef>
+          <a:fillRef idx="0">
+            <a:schemeClr val="accent1"/>
+          </a:fillRef>
+          <a:effectRef idx="1">
+            <a:schemeClr val="accent1"/>
+          </a:effectRef>
+          <a:fontRef idx="minor">
+            <a:schemeClr val="tx1"/>
+          </a:fontRef>
+        </p:style>
+      </p:cxnSp>
+      <p:cxnSp>
+        <p:nvCxnSpPr>
+          <p:cNvPr id="4" name="Connector 3">
+            <a:extLst>
+              <a:ext uri="{FF2B5EF4-FFF2-40B4-BE49-F238E27FC236}">
+                <a16:creationId xmlns:a16="http://schemas.microsoft.com/office/drawing/2014/main" id="{288E5373-0C85-A83B-1338-A98B46BB66FC}"/>
+              </a:ext>
+            </a:extLst>
+          </p:cNvPr>
+          <p:cNvCxnSpPr/>
+          <p:nvPr/>
+        </p:nvCxnSpPr>
+        <p:spPr>
+          <a:xfrm>
+            <a:off x="10698480" y="521207"/>
+            <a:ext cx="850392" cy="0"/>
+          </a:xfrm>
+          <a:prstGeom prst="line">
+            <a:avLst/>
+          </a:prstGeom>
+          <a:ln w="8890">
+            <a:solidFill>
+              <a:srgbClr val="CCD1D0"/>
+            </a:solidFill>
+          </a:ln>
+        </p:spPr>
+        <p:style>
+          <a:lnRef idx="2">
+            <a:schemeClr val="accent1"/>
+          </a:lnRef>
+          <a:fillRef idx="0">
+            <a:schemeClr val="accent1"/>
+          </a:fillRef>
+          <a:effectRef idx="1">
+            <a:schemeClr val="accent1"/>
+          </a:effectRef>
+          <a:fontRef idx="minor">
+            <a:schemeClr val="tx1"/>
+          </a:fontRef>
+        </p:style>
+      </p:cxnSp>
+      <p:cxnSp>
+        <p:nvCxnSpPr>
+          <p:cNvPr id="5" name="Connector 4">
+            <a:extLst>
+              <a:ext uri="{FF2B5EF4-FFF2-40B4-BE49-F238E27FC236}">
+                <a16:creationId xmlns:a16="http://schemas.microsoft.com/office/drawing/2014/main" id="{9ABA06F0-AF46-74CF-20A7-7656E63093E8}"/>
+              </a:ext>
+            </a:extLst>
+          </p:cNvPr>
+          <p:cNvCxnSpPr/>
+          <p:nvPr/>
+        </p:nvCxnSpPr>
+        <p:spPr>
+          <a:xfrm>
+            <a:off x="10698480" y="658368"/>
+            <a:ext cx="740664" cy="0"/>
+          </a:xfrm>
+          <a:prstGeom prst="line">
+            <a:avLst/>
+          </a:prstGeom>
+          <a:ln w="8890">
+            <a:solidFill>
+              <a:srgbClr val="CCD1D0"/>
+            </a:solidFill>
+          </a:ln>
+        </p:spPr>
+        <p:style>
+          <a:lnRef idx="2">
+            <a:schemeClr val="accent1"/>
+          </a:lnRef>
+          <a:fillRef idx="0">
+            <a:schemeClr val="accent1"/>
+          </a:fillRef>
+          <a:effectRef idx="1">
+            <a:schemeClr val="accent1"/>
+          </a:effectRef>
+          <a:fontRef idx="minor">
+            <a:schemeClr val="tx1"/>
+          </a:fontRef>
+        </p:style>
+      </p:cxnSp>
+      <p:cxnSp>
+        <p:nvCxnSpPr>
+          <p:cNvPr id="6" name="Connector 5">
+            <a:extLst>
+              <a:ext uri="{FF2B5EF4-FFF2-40B4-BE49-F238E27FC236}">
+                <a16:creationId xmlns:a16="http://schemas.microsoft.com/office/drawing/2014/main" id="{0BF32833-7F79-40D4-69B0-FD66FC93C0B0}"/>
+              </a:ext>
+            </a:extLst>
+          </p:cNvPr>
+          <p:cNvCxnSpPr/>
+          <p:nvPr/>
+        </p:nvCxnSpPr>
+        <p:spPr>
+          <a:xfrm>
+            <a:off x="10698480" y="795527"/>
+            <a:ext cx="630936" cy="0"/>
+          </a:xfrm>
+          <a:prstGeom prst="line">
+            <a:avLst/>
+          </a:prstGeom>
+          <a:ln w="8890">
+            <a:solidFill>
+              <a:srgbClr val="CCD1D0"/>
+            </a:solidFill>
+          </a:ln>
+        </p:spPr>
+        <p:style>
+          <a:lnRef idx="2">
+            <a:schemeClr val="accent1"/>
+          </a:lnRef>
+          <a:fillRef idx="0">
+            <a:schemeClr val="accent1"/>
+          </a:fillRef>
+          <a:effectRef idx="1">
+            <a:schemeClr val="accent1"/>
+          </a:effectRef>
+          <a:fontRef idx="minor">
+            <a:schemeClr val="tx1"/>
+          </a:fontRef>
+        </p:style>
+      </p:cxnSp>
+      <p:cxnSp>
+        <p:nvCxnSpPr>
+          <p:cNvPr id="7" name="Connector 6">
+            <a:extLst>
+              <a:ext uri="{FF2B5EF4-FFF2-40B4-BE49-F238E27FC236}">
+                <a16:creationId xmlns:a16="http://schemas.microsoft.com/office/drawing/2014/main" id="{438FA707-30F5-FF28-2F1E-21268B08AC78}"/>
+              </a:ext>
+            </a:extLst>
+          </p:cNvPr>
+          <p:cNvCxnSpPr/>
+          <p:nvPr/>
+        </p:nvCxnSpPr>
+        <p:spPr>
+          <a:xfrm>
+            <a:off x="10698480" y="932688"/>
+            <a:ext cx="521208" cy="0"/>
+          </a:xfrm>
+          <a:prstGeom prst="line">
+            <a:avLst/>
+          </a:prstGeom>
+          <a:ln w="8890">
+            <a:solidFill>
+              <a:srgbClr val="CCD1D0"/>
+            </a:solidFill>
+          </a:ln>
+        </p:spPr>
+        <p:style>
+          <a:lnRef idx="2">
+            <a:schemeClr val="accent1"/>
+          </a:lnRef>
+          <a:fillRef idx="0">
+            <a:schemeClr val="accent1"/>
+          </a:fillRef>
+          <a:effectRef idx="1">
+            <a:schemeClr val="accent1"/>
+          </a:effectRef>
+          <a:fontRef idx="minor">
+            <a:schemeClr val="tx1"/>
+          </a:fontRef>
+        </p:style>
+      </p:cxnSp>
+      <p:sp>
+        <p:nvSpPr>
+          <p:cNvPr id="8" name="TextBox 7">
+            <a:extLst>
+              <a:ext uri="{FF2B5EF4-FFF2-40B4-BE49-F238E27FC236}">
+                <a16:creationId xmlns:a16="http://schemas.microsoft.com/office/drawing/2014/main" id="{04F1A740-3A2A-9D75-3509-B156B9960FC1}"/>
+              </a:ext>
+            </a:extLst>
+          </p:cNvPr>
+          <p:cNvSpPr txBox="1"/>
+          <p:nvPr/>
+        </p:nvSpPr>
+        <p:spPr>
+          <a:xfrm>
+            <a:off x="502920" y="6473952"/>
+            <a:ext cx="5029200" cy="182880"/>
+          </a:xfrm>
+          <a:prstGeom prst="rect">
+            <a:avLst/>
+          </a:prstGeom>
+          <a:noFill/>
+        </p:spPr>
+        <p:txBody>
+          <a:bodyPr wrap="square" lIns="0" tIns="0" rIns="0" bIns="0" anchor="t">
+            <a:spAutoFit/>
+          </a:bodyPr>
+          <a:lstStyle/>
+          <a:p>
+            <a:pPr algn="l"/>
+            <a:r>
+              <a:rPr sz="850" b="1" i="0">
+                <a:solidFill>
+                  <a:srgbClr val="5F6B73"/>
+                </a:solidFill>
+                <a:latin typeface="Aptos"/>
+              </a:rPr>
+              <a:t>LECTURE 16 | FILTERS CLOCK RECOVERY PLLS </a:t>
+            </a:r>
+          </a:p>
+        </p:txBody>
+      </p:sp>
+      <p:sp>
+        <p:nvSpPr>
+          <p:cNvPr id="9" name="TextBox 8">
+            <a:extLst>
+              <a:ext uri="{FF2B5EF4-FFF2-40B4-BE49-F238E27FC236}">
+                <a16:creationId xmlns:a16="http://schemas.microsoft.com/office/drawing/2014/main" id="{08C5DB6F-D7CB-C2C2-F413-DB0EF992E5DF}"/>
+              </a:ext>
+            </a:extLst>
+          </p:cNvPr>
+          <p:cNvSpPr txBox="1"/>
+          <p:nvPr/>
+        </p:nvSpPr>
+        <p:spPr>
+          <a:xfrm>
+            <a:off x="11018520" y="6419088"/>
+            <a:ext cx="594360" cy="228600"/>
+          </a:xfrm>
+          <a:prstGeom prst="rect">
+            <a:avLst/>
+          </a:prstGeom>
+          <a:noFill/>
+        </p:spPr>
+        <p:txBody>
+          <a:bodyPr wrap="square" lIns="0" tIns="0" rIns="0" bIns="0" anchor="t">
+            <a:spAutoFit/>
+          </a:bodyPr>
+          <a:lstStyle/>
+          <a:p>
+            <a:pPr algn="r"/>
+            <a:r>
+              <a:rPr sz="1000" b="1" i="0">
+                <a:solidFill>
+                  <a:srgbClr val="5F6B73"/>
+                </a:solidFill>
+                <a:latin typeface="Aptos"/>
+              </a:rPr>
+              <a:t>04</a:t>
+            </a:r>
+          </a:p>
+        </p:txBody>
+      </p:sp>
+      <p:sp>
+        <p:nvSpPr>
+          <p:cNvPr id="10" name="TextBox 9">
+            <a:extLst>
+              <a:ext uri="{FF2B5EF4-FFF2-40B4-BE49-F238E27FC236}">
+                <a16:creationId xmlns:a16="http://schemas.microsoft.com/office/drawing/2014/main" id="{8460ABA2-F930-9E2D-E657-DCAFBFB4E4B9}"/>
+              </a:ext>
+            </a:extLst>
+          </p:cNvPr>
+          <p:cNvSpPr txBox="1"/>
+          <p:nvPr/>
+        </p:nvSpPr>
+        <p:spPr>
+          <a:xfrm>
+            <a:off x="621792" y="384048"/>
+            <a:ext cx="10881360" cy="292608"/>
+          </a:xfrm>
+          <a:prstGeom prst="rect">
+            <a:avLst/>
+          </a:prstGeom>
+          <a:noFill/>
+        </p:spPr>
+        <p:txBody>
+          <a:bodyPr wrap="square" lIns="0" tIns="0" rIns="0" bIns="0" anchor="t">
+            <a:spAutoFit/>
+          </a:bodyPr>
+          <a:lstStyle/>
+          <a:p>
+            <a:pPr algn="l"/>
+            <a:r>
+              <a:rPr sz="1050" b="1" i="0">
+                <a:solidFill>
+                  <a:srgbClr val="0F6D74"/>
+                </a:solidFill>
+                <a:latin typeface="Aptos"/>
+              </a:rPr>
+              <a:t>WORKING VOCABULARY</a:t>
+            </a:r>
+          </a:p>
+        </p:txBody>
+      </p:sp>
+      <p:sp>
+        <p:nvSpPr>
+          <p:cNvPr id="11" name="TextBox 10">
+            <a:extLst>
+              <a:ext uri="{FF2B5EF4-FFF2-40B4-BE49-F238E27FC236}">
+                <a16:creationId xmlns:a16="http://schemas.microsoft.com/office/drawing/2014/main" id="{D55D189E-A2E0-365D-C338-3F529611DA46}"/>
+              </a:ext>
+            </a:extLst>
+          </p:cNvPr>
+          <p:cNvSpPr txBox="1"/>
+          <p:nvPr/>
+        </p:nvSpPr>
+        <p:spPr>
+          <a:xfrm>
+            <a:off x="594360" y="749808"/>
+            <a:ext cx="10881360" cy="446276"/>
+          </a:xfrm>
+          <a:prstGeom prst="rect">
+            <a:avLst/>
+          </a:prstGeom>
+          <a:noFill/>
+        </p:spPr>
+        <p:txBody>
+          <a:bodyPr wrap="square" lIns="0" tIns="0" rIns="0" bIns="0" anchor="t">
+            <a:spAutoFit/>
+          </a:bodyPr>
+          <a:lstStyle/>
+          <a:p>
+            <a:r>
+              <a:rPr lang="en-US" sz="2900" b="1" dirty="0">
+                <a:solidFill>
+                  <a:srgbClr val="17324D"/>
+                </a:solidFill>
+                <a:latin typeface="Aptos Display"/>
+              </a:rPr>
+              <a:t>Continually Correct the Timing</a:t>
+            </a:r>
+          </a:p>
+        </p:txBody>
+      </p:sp>
+      <p:cxnSp>
+        <p:nvCxnSpPr>
+          <p:cNvPr id="12" name="Connector 11">
+            <a:extLst>
+              <a:ext uri="{FF2B5EF4-FFF2-40B4-BE49-F238E27FC236}">
+                <a16:creationId xmlns:a16="http://schemas.microsoft.com/office/drawing/2014/main" id="{47C30894-5AC6-783B-7713-9C50CBE8BFBE}"/>
+              </a:ext>
+            </a:extLst>
+          </p:cNvPr>
+          <p:cNvCxnSpPr/>
+          <p:nvPr/>
+        </p:nvCxnSpPr>
+        <p:spPr>
+          <a:xfrm>
+            <a:off x="612648" y="1444752"/>
+            <a:ext cx="1143000" cy="0"/>
+          </a:xfrm>
+          <a:prstGeom prst="line">
+            <a:avLst/>
+          </a:prstGeom>
+          <a:ln w="38100">
+            <a:solidFill>
+              <a:srgbClr val="D96F32"/>
+            </a:solidFill>
+          </a:ln>
+        </p:spPr>
+        <p:style>
+          <a:lnRef idx="2">
+            <a:schemeClr val="accent1"/>
+          </a:lnRef>
+          <a:fillRef idx="0">
+            <a:schemeClr val="accent1"/>
+          </a:fillRef>
+          <a:effectRef idx="1">
+            <a:schemeClr val="accent1"/>
+          </a:effectRef>
+          <a:fontRef idx="minor">
+            <a:schemeClr val="tx1"/>
+          </a:fontRef>
+        </p:style>
+      </p:cxnSp>
+      <p:sp>
+        <p:nvSpPr>
+          <p:cNvPr id="37" name="Rounded Rectangle 20">
+            <a:extLst>
+              <a:ext uri="{FF2B5EF4-FFF2-40B4-BE49-F238E27FC236}">
+                <a16:creationId xmlns:a16="http://schemas.microsoft.com/office/drawing/2014/main" id="{48C18269-1309-0765-1B54-65076A1139DF}"/>
+              </a:ext>
+            </a:extLst>
+          </p:cNvPr>
+          <p:cNvSpPr/>
+          <p:nvPr/>
+        </p:nvSpPr>
+        <p:spPr>
+          <a:xfrm>
+            <a:off x="629027" y="1828801"/>
+            <a:ext cx="3832860" cy="1795714"/>
+          </a:xfrm>
+          <a:prstGeom prst="roundRect">
+            <a:avLst/>
+          </a:prstGeom>
+          <a:solidFill>
+            <a:srgbClr val="F4E3D8"/>
+          </a:solidFill>
+          <a:ln w="10160">
+            <a:solidFill>
+              <a:srgbClr val="CCD1D0"/>
+            </a:solidFill>
+          </a:ln>
+        </p:spPr>
+        <p:style>
+          <a:lnRef idx="1">
+            <a:schemeClr val="accent1"/>
+          </a:lnRef>
+          <a:fillRef idx="3">
+            <a:schemeClr val="accent1"/>
+          </a:fillRef>
+          <a:effectRef idx="2">
+            <a:schemeClr val="accent1"/>
+          </a:effectRef>
+          <a:fontRef idx="minor">
+            <a:schemeClr val="lt1"/>
+          </a:fontRef>
+        </p:style>
+        <p:txBody>
+          <a:bodyPr rtlCol="0" anchor="ctr"/>
+          <a:lstStyle/>
+          <a:p>
+            <a:pPr algn="ctr"/>
+            <a:endParaRPr/>
+          </a:p>
+        </p:txBody>
+      </p:sp>
+      <p:sp>
+        <p:nvSpPr>
+          <p:cNvPr id="39" name="Rectangle 38">
+            <a:extLst>
+              <a:ext uri="{FF2B5EF4-FFF2-40B4-BE49-F238E27FC236}">
+                <a16:creationId xmlns:a16="http://schemas.microsoft.com/office/drawing/2014/main" id="{82759087-4168-5DBE-E2E9-D77F026F1F84}"/>
+              </a:ext>
+            </a:extLst>
+          </p:cNvPr>
+          <p:cNvSpPr/>
+          <p:nvPr/>
+        </p:nvSpPr>
+        <p:spPr>
+          <a:xfrm>
+            <a:off x="629026" y="1828801"/>
+            <a:ext cx="96267" cy="1795714"/>
+          </a:xfrm>
+          <a:prstGeom prst="rect">
+            <a:avLst/>
+          </a:prstGeom>
+          <a:solidFill>
+            <a:srgbClr val="D96F32"/>
+          </a:solidFill>
+          <a:ln>
+            <a:noFill/>
+          </a:ln>
+        </p:spPr>
+        <p:style>
+          <a:lnRef idx="1">
+            <a:schemeClr val="accent1"/>
+          </a:lnRef>
+          <a:fillRef idx="3">
+            <a:schemeClr val="accent1"/>
+          </a:fillRef>
+          <a:effectRef idx="2">
+            <a:schemeClr val="accent1"/>
+          </a:effectRef>
+          <a:fontRef idx="minor">
+            <a:schemeClr val="lt1"/>
+          </a:fontRef>
+        </p:style>
+        <p:txBody>
+          <a:bodyPr rtlCol="0" anchor="ctr"/>
+          <a:lstStyle/>
+          <a:p>
+            <a:pPr algn="ctr"/>
+            <a:endParaRPr/>
+          </a:p>
+        </p:txBody>
+      </p:sp>
+      <p:sp>
+        <p:nvSpPr>
+          <p:cNvPr id="43" name="TextBox 42">
+            <a:extLst>
+              <a:ext uri="{FF2B5EF4-FFF2-40B4-BE49-F238E27FC236}">
+                <a16:creationId xmlns:a16="http://schemas.microsoft.com/office/drawing/2014/main" id="{72244908-E82A-09BA-C362-A8231EDBA5CD}"/>
+              </a:ext>
+            </a:extLst>
+          </p:cNvPr>
+          <p:cNvSpPr txBox="1"/>
+          <p:nvPr/>
+        </p:nvSpPr>
+        <p:spPr>
+          <a:xfrm>
+            <a:off x="857627" y="2432304"/>
+            <a:ext cx="3282294" cy="923330"/>
+          </a:xfrm>
+          <a:prstGeom prst="rect">
+            <a:avLst/>
+          </a:prstGeom>
+          <a:noFill/>
+        </p:spPr>
+        <p:txBody>
+          <a:bodyPr wrap="square" lIns="0" tIns="0" rIns="0" bIns="0" anchor="t">
+            <a:spAutoFit/>
+          </a:bodyPr>
+          <a:lstStyle/>
+          <a:p>
+            <a:pPr marL="0" lvl="1"/>
+            <a:r>
+              <a:rPr lang="en-US" sz="2000" dirty="0">
+                <a:latin typeface="Aptos" panose="020B0004020202020204" pitchFamily="34" charset="0"/>
+              </a:rPr>
+              <a:t>Encode the data so that long sequences without transitions are avoided.</a:t>
+            </a:r>
+          </a:p>
+        </p:txBody>
+      </p:sp>
+      <p:pic>
+        <p:nvPicPr>
+          <p:cNvPr id="14" name="Picture 13">
+            <a:extLst>
+              <a:ext uri="{FF2B5EF4-FFF2-40B4-BE49-F238E27FC236}">
+                <a16:creationId xmlns:a16="http://schemas.microsoft.com/office/drawing/2014/main" id="{DEF44552-CF79-173F-CC62-AB375D58CA65}"/>
+              </a:ext>
+            </a:extLst>
+          </p:cNvPr>
+          <p:cNvPicPr>
+            <a:picLocks noChangeAspect="1"/>
+          </p:cNvPicPr>
+          <p:nvPr/>
+        </p:nvPicPr>
+        <p:blipFill>
+          <a:blip r:embed="rId3">
+            <a:extLst>
+              <a:ext uri="{28A0092B-C50C-407E-A947-70E740481C1C}">
+                <a14:useLocalDpi xmlns:a14="http://schemas.microsoft.com/office/drawing/2010/main" val="0"/>
+              </a:ext>
+            </a:extLst>
+          </a:blip>
+          <a:stretch>
+            <a:fillRect/>
+          </a:stretch>
+        </p:blipFill>
+        <p:spPr>
+          <a:xfrm>
+            <a:off x="6472227" y="0"/>
+            <a:ext cx="4691743" cy="6858000"/>
+          </a:xfrm>
+          <a:prstGeom prst="rect">
+            <a:avLst/>
+          </a:prstGeom>
+        </p:spPr>
+      </p:pic>
+      <p:sp>
+        <p:nvSpPr>
+          <p:cNvPr id="17" name="TextBox 16">
+            <a:extLst>
+              <a:ext uri="{FF2B5EF4-FFF2-40B4-BE49-F238E27FC236}">
+                <a16:creationId xmlns:a16="http://schemas.microsoft.com/office/drawing/2014/main" id="{727A4469-C8E1-F60C-789C-2D3024E82E93}"/>
+              </a:ext>
+            </a:extLst>
+          </p:cNvPr>
+          <p:cNvSpPr txBox="1"/>
+          <p:nvPr/>
+        </p:nvSpPr>
+        <p:spPr>
+          <a:xfrm>
+            <a:off x="857627" y="1993392"/>
+            <a:ext cx="3282294" cy="307777"/>
+          </a:xfrm>
+          <a:prstGeom prst="rect">
+            <a:avLst/>
+          </a:prstGeom>
+          <a:noFill/>
+        </p:spPr>
+        <p:txBody>
+          <a:bodyPr wrap="square" lIns="0" tIns="0" rIns="0" bIns="0" anchor="t">
+            <a:spAutoFit/>
+          </a:bodyPr>
+          <a:lstStyle/>
+          <a:p>
+            <a:pPr algn="l"/>
+            <a:r>
+              <a:rPr lang="en-US" sz="2000" b="1" dirty="0">
+                <a:solidFill>
+                  <a:srgbClr val="17324D"/>
+                </a:solidFill>
+                <a:latin typeface="Aptos"/>
+              </a:rPr>
+              <a:t>Run-Length Limiting (RLL)</a:t>
+            </a:r>
+          </a:p>
+        </p:txBody>
+      </p:sp>
+      <p:pic>
+        <p:nvPicPr>
+          <p:cNvPr id="19" name="Picture 18">
+            <a:extLst>
+              <a:ext uri="{FF2B5EF4-FFF2-40B4-BE49-F238E27FC236}">
+                <a16:creationId xmlns:a16="http://schemas.microsoft.com/office/drawing/2014/main" id="{3C30E154-A377-9048-15A4-4F9D62BDB51B}"/>
+              </a:ext>
+            </a:extLst>
+          </p:cNvPr>
+          <p:cNvPicPr>
+            <a:picLocks noChangeAspect="1"/>
+          </p:cNvPicPr>
+          <p:nvPr/>
+        </p:nvPicPr>
+        <p:blipFill>
+          <a:blip r:embed="rId4"/>
+          <a:srcRect/>
+          <a:stretch>
+            <a:fillRect/>
+          </a:stretch>
+        </p:blipFill>
+        <p:spPr>
+          <a:xfrm>
+            <a:off x="1101437" y="3888732"/>
+            <a:ext cx="4365620" cy="2182810"/>
+          </a:xfrm>
+          <a:prstGeom prst="rect">
+            <a:avLst/>
+          </a:prstGeom>
+        </p:spPr>
+      </p:pic>
+    </p:spTree>
+    <p:extLst>
+      <p:ext uri="{BB962C8B-B14F-4D97-AF65-F5344CB8AC3E}">
+        <p14:creationId xmlns:p14="http://schemas.microsoft.com/office/powerpoint/2010/main" val="3613530828"/>
+      </p:ext>
+    </p:extLst>
+  </p:cSld>
+  <p:clrMapOvr>
+    <a:masterClrMapping/>
+  </p:clrMapOvr>
+</p:sld>
+</file>
+
+<file path=ppt/slides/slide11.xml><?xml version="1.0" encoding="utf-8"?>
+<p:sld xmlns:a="http://schemas.openxmlformats.org/drawingml/2006/main" xmlns:r="http://schemas.openxmlformats.org/officeDocument/2006/relationships" xmlns:p="http://schemas.openxmlformats.org/presentationml/2006/main">
+  <p:cSld>
+    <p:bg>
+      <p:bgPr>
+        <a:solidFill>
+          <a:srgbClr val="F5F1E8"/>
+        </a:solidFill>
+        <a:effectLst/>
+      </p:bgPr>
+    </p:bg>
+    <p:spTree>
+      <p:nvGrpSpPr>
         <p:cNvPr id="1" name=""/>
         <p:cNvGrpSpPr/>
         <p:nvPr/>
@@ -5574,7 +6435,7 @@
 </p:sld>
 </file>
 
-<file path=ppt/slides/slide11.xml><?xml version="1.0" encoding="utf-8"?>
+<file path=ppt/slides/slide12.xml><?xml version="1.0" encoding="utf-8"?>
 <p:sld xmlns:a="http://schemas.openxmlformats.org/drawingml/2006/main" xmlns:r="http://schemas.openxmlformats.org/officeDocument/2006/relationships" xmlns:p="http://schemas.openxmlformats.org/presentationml/2006/main">
   <p:cSld>
     <p:bg>
@@ -9138,6 +9999,1185 @@
     </p:bg>
     <p:spTree>
       <p:nvGrpSpPr>
+        <p:cNvPr id="1" name="">
+          <a:extLst>
+            <a:ext uri="{FF2B5EF4-FFF2-40B4-BE49-F238E27FC236}">
+              <a16:creationId xmlns:a16="http://schemas.microsoft.com/office/drawing/2014/main" id="{0BDFD5ED-1F34-4CBF-E7DF-829B95893F6F}"/>
+            </a:ext>
+          </a:extLst>
+        </p:cNvPr>
+        <p:cNvGrpSpPr/>
+        <p:nvPr/>
+      </p:nvGrpSpPr>
+      <p:grpSpPr>
+        <a:xfrm>
+          <a:off x="0" y="0"/>
+          <a:ext cx="0" cy="0"/>
+          <a:chOff x="0" y="0"/>
+          <a:chExt cx="0" cy="0"/>
+        </a:xfrm>
+      </p:grpSpPr>
+      <p:sp>
+        <p:nvSpPr>
+          <p:cNvPr id="2" name="Rectangle 1">
+            <a:extLst>
+              <a:ext uri="{FF2B5EF4-FFF2-40B4-BE49-F238E27FC236}">
+                <a16:creationId xmlns:a16="http://schemas.microsoft.com/office/drawing/2014/main" id="{87811509-49C1-2B77-47E9-82E81091969C}"/>
+              </a:ext>
+            </a:extLst>
+          </p:cNvPr>
+          <p:cNvSpPr/>
+          <p:nvPr/>
+        </p:nvSpPr>
+        <p:spPr>
+          <a:xfrm>
+            <a:off x="0" y="0"/>
+            <a:ext cx="164592" cy="6858000"/>
+          </a:xfrm>
+          <a:prstGeom prst="rect">
+            <a:avLst/>
+          </a:prstGeom>
+          <a:solidFill>
+            <a:srgbClr val="0F6D74"/>
+          </a:solidFill>
+          <a:ln>
+            <a:noFill/>
+          </a:ln>
+        </p:spPr>
+        <p:style>
+          <a:lnRef idx="1">
+            <a:schemeClr val="accent1"/>
+          </a:lnRef>
+          <a:fillRef idx="3">
+            <a:schemeClr val="accent1"/>
+          </a:fillRef>
+          <a:effectRef idx="2">
+            <a:schemeClr val="accent1"/>
+          </a:effectRef>
+          <a:fontRef idx="minor">
+            <a:schemeClr val="lt1"/>
+          </a:fontRef>
+        </p:style>
+        <p:txBody>
+          <a:bodyPr rtlCol="0" anchor="ctr"/>
+          <a:lstStyle/>
+          <a:p>
+            <a:pPr algn="ctr"/>
+            <a:endParaRPr/>
+          </a:p>
+        </p:txBody>
+      </p:sp>
+      <p:cxnSp>
+        <p:nvCxnSpPr>
+          <p:cNvPr id="3" name="Connector 2">
+            <a:extLst>
+              <a:ext uri="{FF2B5EF4-FFF2-40B4-BE49-F238E27FC236}">
+                <a16:creationId xmlns:a16="http://schemas.microsoft.com/office/drawing/2014/main" id="{CEF86D87-FEBF-941E-3726-1A4464708FF3}"/>
+              </a:ext>
+            </a:extLst>
+          </p:cNvPr>
+          <p:cNvCxnSpPr/>
+          <p:nvPr/>
+        </p:nvCxnSpPr>
+        <p:spPr>
+          <a:xfrm>
+            <a:off x="10698480" y="384048"/>
+            <a:ext cx="960120" cy="0"/>
+          </a:xfrm>
+          <a:prstGeom prst="line">
+            <a:avLst/>
+          </a:prstGeom>
+          <a:ln w="8890">
+            <a:solidFill>
+              <a:srgbClr val="CCD1D0"/>
+            </a:solidFill>
+          </a:ln>
+        </p:spPr>
+        <p:style>
+          <a:lnRef idx="2">
+            <a:schemeClr val="accent1"/>
+          </a:lnRef>
+          <a:fillRef idx="0">
+            <a:schemeClr val="accent1"/>
+          </a:fillRef>
+          <a:effectRef idx="1">
+            <a:schemeClr val="accent1"/>
+          </a:effectRef>
+          <a:fontRef idx="minor">
+            <a:schemeClr val="tx1"/>
+          </a:fontRef>
+        </p:style>
+      </p:cxnSp>
+      <p:cxnSp>
+        <p:nvCxnSpPr>
+          <p:cNvPr id="4" name="Connector 3">
+            <a:extLst>
+              <a:ext uri="{FF2B5EF4-FFF2-40B4-BE49-F238E27FC236}">
+                <a16:creationId xmlns:a16="http://schemas.microsoft.com/office/drawing/2014/main" id="{924A34D9-9AFC-4A72-354A-C97E28EDC53B}"/>
+              </a:ext>
+            </a:extLst>
+          </p:cNvPr>
+          <p:cNvCxnSpPr/>
+          <p:nvPr/>
+        </p:nvCxnSpPr>
+        <p:spPr>
+          <a:xfrm>
+            <a:off x="10698480" y="521207"/>
+            <a:ext cx="850392" cy="0"/>
+          </a:xfrm>
+          <a:prstGeom prst="line">
+            <a:avLst/>
+          </a:prstGeom>
+          <a:ln w="8890">
+            <a:solidFill>
+              <a:srgbClr val="CCD1D0"/>
+            </a:solidFill>
+          </a:ln>
+        </p:spPr>
+        <p:style>
+          <a:lnRef idx="2">
+            <a:schemeClr val="accent1"/>
+          </a:lnRef>
+          <a:fillRef idx="0">
+            <a:schemeClr val="accent1"/>
+          </a:fillRef>
+          <a:effectRef idx="1">
+            <a:schemeClr val="accent1"/>
+          </a:effectRef>
+          <a:fontRef idx="minor">
+            <a:schemeClr val="tx1"/>
+          </a:fontRef>
+        </p:style>
+      </p:cxnSp>
+      <p:cxnSp>
+        <p:nvCxnSpPr>
+          <p:cNvPr id="5" name="Connector 4">
+            <a:extLst>
+              <a:ext uri="{FF2B5EF4-FFF2-40B4-BE49-F238E27FC236}">
+                <a16:creationId xmlns:a16="http://schemas.microsoft.com/office/drawing/2014/main" id="{504ACE06-F995-A3A6-9819-8A3287D03FC6}"/>
+              </a:ext>
+            </a:extLst>
+          </p:cNvPr>
+          <p:cNvCxnSpPr/>
+          <p:nvPr/>
+        </p:nvCxnSpPr>
+        <p:spPr>
+          <a:xfrm>
+            <a:off x="10698480" y="658368"/>
+            <a:ext cx="740664" cy="0"/>
+          </a:xfrm>
+          <a:prstGeom prst="line">
+            <a:avLst/>
+          </a:prstGeom>
+          <a:ln w="8890">
+            <a:solidFill>
+              <a:srgbClr val="CCD1D0"/>
+            </a:solidFill>
+          </a:ln>
+        </p:spPr>
+        <p:style>
+          <a:lnRef idx="2">
+            <a:schemeClr val="accent1"/>
+          </a:lnRef>
+          <a:fillRef idx="0">
+            <a:schemeClr val="accent1"/>
+          </a:fillRef>
+          <a:effectRef idx="1">
+            <a:schemeClr val="accent1"/>
+          </a:effectRef>
+          <a:fontRef idx="minor">
+            <a:schemeClr val="tx1"/>
+          </a:fontRef>
+        </p:style>
+      </p:cxnSp>
+      <p:cxnSp>
+        <p:nvCxnSpPr>
+          <p:cNvPr id="6" name="Connector 5">
+            <a:extLst>
+              <a:ext uri="{FF2B5EF4-FFF2-40B4-BE49-F238E27FC236}">
+                <a16:creationId xmlns:a16="http://schemas.microsoft.com/office/drawing/2014/main" id="{5E10BD84-654C-67C9-4126-EF3E2FE2FBA6}"/>
+              </a:ext>
+            </a:extLst>
+          </p:cNvPr>
+          <p:cNvCxnSpPr/>
+          <p:nvPr/>
+        </p:nvCxnSpPr>
+        <p:spPr>
+          <a:xfrm>
+            <a:off x="10698480" y="795527"/>
+            <a:ext cx="630936" cy="0"/>
+          </a:xfrm>
+          <a:prstGeom prst="line">
+            <a:avLst/>
+          </a:prstGeom>
+          <a:ln w="8890">
+            <a:solidFill>
+              <a:srgbClr val="CCD1D0"/>
+            </a:solidFill>
+          </a:ln>
+        </p:spPr>
+        <p:style>
+          <a:lnRef idx="2">
+            <a:schemeClr val="accent1"/>
+          </a:lnRef>
+          <a:fillRef idx="0">
+            <a:schemeClr val="accent1"/>
+          </a:fillRef>
+          <a:effectRef idx="1">
+            <a:schemeClr val="accent1"/>
+          </a:effectRef>
+          <a:fontRef idx="minor">
+            <a:schemeClr val="tx1"/>
+          </a:fontRef>
+        </p:style>
+      </p:cxnSp>
+      <p:cxnSp>
+        <p:nvCxnSpPr>
+          <p:cNvPr id="7" name="Connector 6">
+            <a:extLst>
+              <a:ext uri="{FF2B5EF4-FFF2-40B4-BE49-F238E27FC236}">
+                <a16:creationId xmlns:a16="http://schemas.microsoft.com/office/drawing/2014/main" id="{8F3094DA-4429-B723-18DD-F79AC1B678A4}"/>
+              </a:ext>
+            </a:extLst>
+          </p:cNvPr>
+          <p:cNvCxnSpPr/>
+          <p:nvPr/>
+        </p:nvCxnSpPr>
+        <p:spPr>
+          <a:xfrm>
+            <a:off x="10698480" y="932688"/>
+            <a:ext cx="521208" cy="0"/>
+          </a:xfrm>
+          <a:prstGeom prst="line">
+            <a:avLst/>
+          </a:prstGeom>
+          <a:ln w="8890">
+            <a:solidFill>
+              <a:srgbClr val="CCD1D0"/>
+            </a:solidFill>
+          </a:ln>
+        </p:spPr>
+        <p:style>
+          <a:lnRef idx="2">
+            <a:schemeClr val="accent1"/>
+          </a:lnRef>
+          <a:fillRef idx="0">
+            <a:schemeClr val="accent1"/>
+          </a:fillRef>
+          <a:effectRef idx="1">
+            <a:schemeClr val="accent1"/>
+          </a:effectRef>
+          <a:fontRef idx="minor">
+            <a:schemeClr val="tx1"/>
+          </a:fontRef>
+        </p:style>
+      </p:cxnSp>
+      <p:sp>
+        <p:nvSpPr>
+          <p:cNvPr id="8" name="TextBox 7">
+            <a:extLst>
+              <a:ext uri="{FF2B5EF4-FFF2-40B4-BE49-F238E27FC236}">
+                <a16:creationId xmlns:a16="http://schemas.microsoft.com/office/drawing/2014/main" id="{1667D297-7182-9297-ACA8-53AD95078053}"/>
+              </a:ext>
+            </a:extLst>
+          </p:cNvPr>
+          <p:cNvSpPr txBox="1"/>
+          <p:nvPr/>
+        </p:nvSpPr>
+        <p:spPr>
+          <a:xfrm>
+            <a:off x="502920" y="6473952"/>
+            <a:ext cx="5029200" cy="182880"/>
+          </a:xfrm>
+          <a:prstGeom prst="rect">
+            <a:avLst/>
+          </a:prstGeom>
+          <a:noFill/>
+        </p:spPr>
+        <p:txBody>
+          <a:bodyPr wrap="square" lIns="0" tIns="0" rIns="0" bIns="0" anchor="t">
+            <a:spAutoFit/>
+          </a:bodyPr>
+          <a:lstStyle/>
+          <a:p>
+            <a:pPr algn="l"/>
+            <a:r>
+              <a:rPr sz="850" b="1" i="0">
+                <a:solidFill>
+                  <a:srgbClr val="5F6B73"/>
+                </a:solidFill>
+                <a:latin typeface="Aptos"/>
+              </a:rPr>
+              <a:t>LECTURE 16 | FILTERS CLOCK RECOVERY PLLS </a:t>
+            </a:r>
+          </a:p>
+        </p:txBody>
+      </p:sp>
+      <p:sp>
+        <p:nvSpPr>
+          <p:cNvPr id="9" name="TextBox 8">
+            <a:extLst>
+              <a:ext uri="{FF2B5EF4-FFF2-40B4-BE49-F238E27FC236}">
+                <a16:creationId xmlns:a16="http://schemas.microsoft.com/office/drawing/2014/main" id="{9341F18A-CA9E-0E76-A101-C3717FF732BB}"/>
+              </a:ext>
+            </a:extLst>
+          </p:cNvPr>
+          <p:cNvSpPr txBox="1"/>
+          <p:nvPr/>
+        </p:nvSpPr>
+        <p:spPr>
+          <a:xfrm>
+            <a:off x="11018520" y="6419088"/>
+            <a:ext cx="594360" cy="228600"/>
+          </a:xfrm>
+          <a:prstGeom prst="rect">
+            <a:avLst/>
+          </a:prstGeom>
+          <a:noFill/>
+        </p:spPr>
+        <p:txBody>
+          <a:bodyPr wrap="square" lIns="0" tIns="0" rIns="0" bIns="0" anchor="t">
+            <a:spAutoFit/>
+          </a:bodyPr>
+          <a:lstStyle/>
+          <a:p>
+            <a:pPr algn="r"/>
+            <a:r>
+              <a:rPr sz="1000" b="1" i="0">
+                <a:solidFill>
+                  <a:srgbClr val="5F6B73"/>
+                </a:solidFill>
+                <a:latin typeface="Aptos"/>
+              </a:rPr>
+              <a:t>04</a:t>
+            </a:r>
+          </a:p>
+        </p:txBody>
+      </p:sp>
+      <p:sp>
+        <p:nvSpPr>
+          <p:cNvPr id="10" name="TextBox 9">
+            <a:extLst>
+              <a:ext uri="{FF2B5EF4-FFF2-40B4-BE49-F238E27FC236}">
+                <a16:creationId xmlns:a16="http://schemas.microsoft.com/office/drawing/2014/main" id="{79A9A5EF-03CA-23C2-C393-C0089DCDD44F}"/>
+              </a:ext>
+            </a:extLst>
+          </p:cNvPr>
+          <p:cNvSpPr txBox="1"/>
+          <p:nvPr/>
+        </p:nvSpPr>
+        <p:spPr>
+          <a:xfrm>
+            <a:off x="621792" y="384048"/>
+            <a:ext cx="10881360" cy="292608"/>
+          </a:xfrm>
+          <a:prstGeom prst="rect">
+            <a:avLst/>
+          </a:prstGeom>
+          <a:noFill/>
+        </p:spPr>
+        <p:txBody>
+          <a:bodyPr wrap="square" lIns="0" tIns="0" rIns="0" bIns="0" anchor="t">
+            <a:spAutoFit/>
+          </a:bodyPr>
+          <a:lstStyle/>
+          <a:p>
+            <a:pPr algn="l"/>
+            <a:r>
+              <a:rPr sz="1050" b="1" i="0">
+                <a:solidFill>
+                  <a:srgbClr val="0F6D74"/>
+                </a:solidFill>
+                <a:latin typeface="Aptos"/>
+              </a:rPr>
+              <a:t>WORKING VOCABULARY</a:t>
+            </a:r>
+          </a:p>
+        </p:txBody>
+      </p:sp>
+      <p:sp>
+        <p:nvSpPr>
+          <p:cNvPr id="11" name="TextBox 10">
+            <a:extLst>
+              <a:ext uri="{FF2B5EF4-FFF2-40B4-BE49-F238E27FC236}">
+                <a16:creationId xmlns:a16="http://schemas.microsoft.com/office/drawing/2014/main" id="{8FC0C0BB-C2AB-AB36-9187-773971ECE76A}"/>
+              </a:ext>
+            </a:extLst>
+          </p:cNvPr>
+          <p:cNvSpPr txBox="1"/>
+          <p:nvPr/>
+        </p:nvSpPr>
+        <p:spPr>
+          <a:xfrm>
+            <a:off x="594360" y="749808"/>
+            <a:ext cx="10881360" cy="446276"/>
+          </a:xfrm>
+          <a:prstGeom prst="rect">
+            <a:avLst/>
+          </a:prstGeom>
+          <a:noFill/>
+        </p:spPr>
+        <p:txBody>
+          <a:bodyPr wrap="square" lIns="0" tIns="0" rIns="0" bIns="0" anchor="t">
+            <a:spAutoFit/>
+          </a:bodyPr>
+          <a:lstStyle/>
+          <a:p>
+            <a:pPr algn="l"/>
+            <a:r>
+              <a:rPr lang="en-US" sz="2900" b="1" i="0" dirty="0">
+                <a:solidFill>
+                  <a:srgbClr val="17324D"/>
+                </a:solidFill>
+                <a:latin typeface="Aptos Display"/>
+              </a:rPr>
+              <a:t>Determine when to read each bit </a:t>
+            </a:r>
+            <a:endParaRPr sz="2900" b="1" i="0" dirty="0">
+              <a:solidFill>
+                <a:srgbClr val="17324D"/>
+              </a:solidFill>
+              <a:latin typeface="Aptos Display"/>
+            </a:endParaRPr>
+          </a:p>
+        </p:txBody>
+      </p:sp>
+      <p:cxnSp>
+        <p:nvCxnSpPr>
+          <p:cNvPr id="12" name="Connector 11">
+            <a:extLst>
+              <a:ext uri="{FF2B5EF4-FFF2-40B4-BE49-F238E27FC236}">
+                <a16:creationId xmlns:a16="http://schemas.microsoft.com/office/drawing/2014/main" id="{2F39E29C-DFFC-3DBB-6366-01780D759E3F}"/>
+              </a:ext>
+            </a:extLst>
+          </p:cNvPr>
+          <p:cNvCxnSpPr/>
+          <p:nvPr/>
+        </p:nvCxnSpPr>
+        <p:spPr>
+          <a:xfrm>
+            <a:off x="612648" y="1444752"/>
+            <a:ext cx="1143000" cy="0"/>
+          </a:xfrm>
+          <a:prstGeom prst="line">
+            <a:avLst/>
+          </a:prstGeom>
+          <a:ln w="38100">
+            <a:solidFill>
+              <a:srgbClr val="D96F32"/>
+            </a:solidFill>
+          </a:ln>
+        </p:spPr>
+        <p:style>
+          <a:lnRef idx="2">
+            <a:schemeClr val="accent1"/>
+          </a:lnRef>
+          <a:fillRef idx="0">
+            <a:schemeClr val="accent1"/>
+          </a:fillRef>
+          <a:effectRef idx="1">
+            <a:schemeClr val="accent1"/>
+          </a:effectRef>
+          <a:fontRef idx="minor">
+            <a:schemeClr val="tx1"/>
+          </a:fontRef>
+        </p:style>
+      </p:cxnSp>
+      <p:sp>
+        <p:nvSpPr>
+          <p:cNvPr id="37" name="Rounded Rectangle 20">
+            <a:extLst>
+              <a:ext uri="{FF2B5EF4-FFF2-40B4-BE49-F238E27FC236}">
+                <a16:creationId xmlns:a16="http://schemas.microsoft.com/office/drawing/2014/main" id="{89159328-54FC-0CCA-7488-442424B81FCB}"/>
+              </a:ext>
+            </a:extLst>
+          </p:cNvPr>
+          <p:cNvSpPr/>
+          <p:nvPr/>
+        </p:nvSpPr>
+        <p:spPr>
+          <a:xfrm>
+            <a:off x="629027" y="1828800"/>
+            <a:ext cx="3832860" cy="4590288"/>
+          </a:xfrm>
+          <a:prstGeom prst="roundRect">
+            <a:avLst/>
+          </a:prstGeom>
+          <a:solidFill>
+            <a:srgbClr val="F4E3D8"/>
+          </a:solidFill>
+          <a:ln w="10160">
+            <a:solidFill>
+              <a:srgbClr val="CCD1D0"/>
+            </a:solidFill>
+          </a:ln>
+        </p:spPr>
+        <p:style>
+          <a:lnRef idx="1">
+            <a:schemeClr val="accent1"/>
+          </a:lnRef>
+          <a:fillRef idx="3">
+            <a:schemeClr val="accent1"/>
+          </a:fillRef>
+          <a:effectRef idx="2">
+            <a:schemeClr val="accent1"/>
+          </a:effectRef>
+          <a:fontRef idx="minor">
+            <a:schemeClr val="lt1"/>
+          </a:fontRef>
+        </p:style>
+        <p:txBody>
+          <a:bodyPr rtlCol="0" anchor="ctr"/>
+          <a:lstStyle/>
+          <a:p>
+            <a:pPr algn="ctr"/>
+            <a:endParaRPr lang="ar-AE" dirty="0">
+              <a:solidFill>
+                <a:schemeClr val="tx1"/>
+              </a:solidFill>
+            </a:endParaRPr>
+          </a:p>
+        </p:txBody>
+      </p:sp>
+      <p:sp>
+        <p:nvSpPr>
+          <p:cNvPr id="39" name="Rectangle 38">
+            <a:extLst>
+              <a:ext uri="{FF2B5EF4-FFF2-40B4-BE49-F238E27FC236}">
+                <a16:creationId xmlns:a16="http://schemas.microsoft.com/office/drawing/2014/main" id="{51086FDE-096E-9B6F-7254-18E143B15E96}"/>
+              </a:ext>
+            </a:extLst>
+          </p:cNvPr>
+          <p:cNvSpPr/>
+          <p:nvPr/>
+        </p:nvSpPr>
+        <p:spPr>
+          <a:xfrm>
+            <a:off x="629026" y="1828800"/>
+            <a:ext cx="96267" cy="4590288"/>
+          </a:xfrm>
+          <a:prstGeom prst="rect">
+            <a:avLst/>
+          </a:prstGeom>
+          <a:solidFill>
+            <a:srgbClr val="D96F32"/>
+          </a:solidFill>
+          <a:ln>
+            <a:noFill/>
+          </a:ln>
+        </p:spPr>
+        <p:style>
+          <a:lnRef idx="1">
+            <a:schemeClr val="accent1"/>
+          </a:lnRef>
+          <a:fillRef idx="3">
+            <a:schemeClr val="accent1"/>
+          </a:fillRef>
+          <a:effectRef idx="2">
+            <a:schemeClr val="accent1"/>
+          </a:effectRef>
+          <a:fontRef idx="minor">
+            <a:schemeClr val="lt1"/>
+          </a:fontRef>
+        </p:style>
+        <p:txBody>
+          <a:bodyPr rtlCol="0" anchor="ctr"/>
+          <a:lstStyle/>
+          <a:p>
+            <a:pPr algn="ctr"/>
+            <a:endParaRPr/>
+          </a:p>
+        </p:txBody>
+      </p:sp>
+      <p:sp>
+        <p:nvSpPr>
+          <p:cNvPr id="41" name="TextBox 40">
+            <a:extLst>
+              <a:ext uri="{FF2B5EF4-FFF2-40B4-BE49-F238E27FC236}">
+                <a16:creationId xmlns:a16="http://schemas.microsoft.com/office/drawing/2014/main" id="{54A02FAE-7414-6C0F-AE76-CE4B1CDEFA8E}"/>
+              </a:ext>
+            </a:extLst>
+          </p:cNvPr>
+          <p:cNvSpPr txBox="1"/>
+          <p:nvPr/>
+        </p:nvSpPr>
+        <p:spPr>
+          <a:xfrm>
+            <a:off x="857627" y="2116502"/>
+            <a:ext cx="2865120" cy="246221"/>
+          </a:xfrm>
+          <a:prstGeom prst="rect">
+            <a:avLst/>
+          </a:prstGeom>
+          <a:noFill/>
+        </p:spPr>
+        <p:txBody>
+          <a:bodyPr wrap="square" lIns="0" tIns="0" rIns="0" bIns="0" anchor="t">
+            <a:spAutoFit/>
+          </a:bodyPr>
+          <a:lstStyle/>
+          <a:p>
+            <a:pPr algn="l"/>
+            <a:r>
+              <a:rPr lang="en-US" sz="1600" b="1" dirty="0">
+                <a:solidFill>
+                  <a:srgbClr val="17324D"/>
+                </a:solidFill>
+                <a:latin typeface="Aptos"/>
+              </a:rPr>
+              <a:t>Clock Recovery</a:t>
+            </a:r>
+            <a:endParaRPr sz="1600" b="1" i="0" dirty="0">
+              <a:solidFill>
+                <a:srgbClr val="17324D"/>
+              </a:solidFill>
+              <a:latin typeface="Aptos"/>
+            </a:endParaRPr>
+          </a:p>
+        </p:txBody>
+      </p:sp>
+      <p:sp>
+        <p:nvSpPr>
+          <p:cNvPr id="43" name="TextBox 42">
+            <a:extLst>
+              <a:ext uri="{FF2B5EF4-FFF2-40B4-BE49-F238E27FC236}">
+                <a16:creationId xmlns:a16="http://schemas.microsoft.com/office/drawing/2014/main" id="{9D7E5D12-3B51-D632-AE0D-1CB2FEEA3535}"/>
+              </a:ext>
+            </a:extLst>
+          </p:cNvPr>
+          <p:cNvSpPr txBox="1"/>
+          <p:nvPr/>
+        </p:nvSpPr>
+        <p:spPr>
+          <a:xfrm>
+            <a:off x="857627" y="2432304"/>
+            <a:ext cx="3604260" cy="430887"/>
+          </a:xfrm>
+          <a:prstGeom prst="rect">
+            <a:avLst/>
+          </a:prstGeom>
+          <a:noFill/>
+        </p:spPr>
+        <p:txBody>
+          <a:bodyPr wrap="square" lIns="0" tIns="0" rIns="0" bIns="0" anchor="t">
+            <a:spAutoFit/>
+          </a:bodyPr>
+          <a:lstStyle/>
+          <a:p>
+            <a:r>
+              <a:rPr lang="en-US" sz="1400" dirty="0"/>
+              <a:t>Extraction of symbol timing from a received signal.</a:t>
+            </a:r>
+            <a:endParaRPr lang="en-US" sz="1400" dirty="0">
+              <a:latin typeface="Aptos" panose="020B0004020202020204" pitchFamily="34" charset="0"/>
+            </a:endParaRPr>
+          </a:p>
+        </p:txBody>
+      </p:sp>
+      <p:pic>
+        <p:nvPicPr>
+          <p:cNvPr id="14" name="Picture 13">
+            <a:extLst>
+              <a:ext uri="{FF2B5EF4-FFF2-40B4-BE49-F238E27FC236}">
+                <a16:creationId xmlns:a16="http://schemas.microsoft.com/office/drawing/2014/main" id="{ECBA2267-FEDA-E678-DCD6-B7977C0DE6DB}"/>
+              </a:ext>
+            </a:extLst>
+          </p:cNvPr>
+          <p:cNvPicPr>
+            <a:picLocks noChangeAspect="1"/>
+          </p:cNvPicPr>
+          <p:nvPr/>
+        </p:nvPicPr>
+        <p:blipFill>
+          <a:blip r:embed="rId3"/>
+          <a:srcRect/>
+          <a:stretch>
+            <a:fillRect/>
+          </a:stretch>
+        </p:blipFill>
+        <p:spPr>
+          <a:xfrm>
+            <a:off x="4664169" y="2347273"/>
+            <a:ext cx="7395101" cy="3863283"/>
+          </a:xfrm>
+          <a:prstGeom prst="rect">
+            <a:avLst/>
+          </a:prstGeom>
+        </p:spPr>
+      </p:pic>
+      <p:sp>
+        <p:nvSpPr>
+          <p:cNvPr id="15" name="TextBox 14">
+            <a:extLst>
+              <a:ext uri="{FF2B5EF4-FFF2-40B4-BE49-F238E27FC236}">
+                <a16:creationId xmlns:a16="http://schemas.microsoft.com/office/drawing/2014/main" id="{0D931D8C-75FE-5305-8B07-DDF7E9626BA5}"/>
+              </a:ext>
+            </a:extLst>
+          </p:cNvPr>
+          <p:cNvSpPr txBox="1"/>
+          <p:nvPr/>
+        </p:nvSpPr>
+        <p:spPr>
+          <a:xfrm>
+            <a:off x="857627" y="3091118"/>
+            <a:ext cx="2865120" cy="246221"/>
+          </a:xfrm>
+          <a:prstGeom prst="rect">
+            <a:avLst/>
+          </a:prstGeom>
+          <a:noFill/>
+        </p:spPr>
+        <p:txBody>
+          <a:bodyPr wrap="square" lIns="0" tIns="0" rIns="0" bIns="0" anchor="t">
+            <a:spAutoFit/>
+          </a:bodyPr>
+          <a:lstStyle/>
+          <a:p>
+            <a:pPr algn="l"/>
+            <a:r>
+              <a:rPr lang="en-US" sz="1600" b="1" dirty="0">
+                <a:solidFill>
+                  <a:srgbClr val="17324D"/>
+                </a:solidFill>
+                <a:latin typeface="Aptos"/>
+              </a:rPr>
+              <a:t>Symbol</a:t>
+            </a:r>
+            <a:endParaRPr sz="1600" b="1" i="0" dirty="0">
+              <a:solidFill>
+                <a:srgbClr val="17324D"/>
+              </a:solidFill>
+              <a:latin typeface="Aptos"/>
+            </a:endParaRPr>
+          </a:p>
+        </p:txBody>
+      </p:sp>
+      <p:sp>
+        <p:nvSpPr>
+          <p:cNvPr id="16" name="TextBox 15">
+            <a:extLst>
+              <a:ext uri="{FF2B5EF4-FFF2-40B4-BE49-F238E27FC236}">
+                <a16:creationId xmlns:a16="http://schemas.microsoft.com/office/drawing/2014/main" id="{98C8C2B6-D36D-D305-29EC-068E564C9CC1}"/>
+              </a:ext>
+            </a:extLst>
+          </p:cNvPr>
+          <p:cNvSpPr txBox="1"/>
+          <p:nvPr/>
+        </p:nvSpPr>
+        <p:spPr>
+          <a:xfrm>
+            <a:off x="857627" y="3406920"/>
+            <a:ext cx="3604260" cy="430887"/>
+          </a:xfrm>
+          <a:prstGeom prst="rect">
+            <a:avLst/>
+          </a:prstGeom>
+          <a:noFill/>
+        </p:spPr>
+        <p:txBody>
+          <a:bodyPr wrap="square" lIns="0" tIns="0" rIns="0" bIns="0" anchor="t">
+            <a:spAutoFit/>
+          </a:bodyPr>
+          <a:lstStyle/>
+          <a:p>
+            <a:r>
+              <a:rPr lang="en-US" sz="1400" dirty="0"/>
+              <a:t>The physical signal state that represents one or more bits of information.</a:t>
+            </a:r>
+            <a:endParaRPr lang="en-US" sz="1400" dirty="0">
+              <a:latin typeface="Aptos" panose="020B0004020202020204" pitchFamily="34" charset="0"/>
+            </a:endParaRPr>
+          </a:p>
+        </p:txBody>
+      </p:sp>
+      <p:sp>
+        <p:nvSpPr>
+          <p:cNvPr id="17" name="TextBox 16">
+            <a:extLst>
+              <a:ext uri="{FF2B5EF4-FFF2-40B4-BE49-F238E27FC236}">
+                <a16:creationId xmlns:a16="http://schemas.microsoft.com/office/drawing/2014/main" id="{3B8DBB8D-9025-428F-E42A-838550CB3D07}"/>
+              </a:ext>
+            </a:extLst>
+          </p:cNvPr>
+          <p:cNvSpPr txBox="1"/>
+          <p:nvPr/>
+        </p:nvSpPr>
+        <p:spPr>
+          <a:xfrm>
+            <a:off x="857627" y="4347412"/>
+            <a:ext cx="2865120" cy="246221"/>
+          </a:xfrm>
+          <a:prstGeom prst="rect">
+            <a:avLst/>
+          </a:prstGeom>
+          <a:noFill/>
+        </p:spPr>
+        <p:txBody>
+          <a:bodyPr wrap="square" lIns="0" tIns="0" rIns="0" bIns="0" anchor="t">
+            <a:spAutoFit/>
+          </a:bodyPr>
+          <a:lstStyle/>
+          <a:p>
+            <a:pPr algn="l"/>
+            <a:r>
+              <a:rPr lang="en-US" sz="1600" b="1" dirty="0">
+                <a:solidFill>
+                  <a:srgbClr val="17324D"/>
+                </a:solidFill>
+                <a:latin typeface="Aptos"/>
+              </a:rPr>
+              <a:t>Bit Interval</a:t>
+            </a:r>
+            <a:endParaRPr sz="1600" b="1" i="0" dirty="0">
+              <a:solidFill>
+                <a:srgbClr val="17324D"/>
+              </a:solidFill>
+              <a:latin typeface="Aptos"/>
+            </a:endParaRPr>
+          </a:p>
+        </p:txBody>
+      </p:sp>
+      <mc:AlternateContent xmlns:mc="http://schemas.openxmlformats.org/markup-compatibility/2006">
+        <mc:Choice xmlns:a14="http://schemas.microsoft.com/office/drawing/2010/main" Requires="a14">
+          <p:sp>
+            <p:nvSpPr>
+              <p:cNvPr id="18" name="TextBox 17">
+                <a:extLst>
+                  <a:ext uri="{FF2B5EF4-FFF2-40B4-BE49-F238E27FC236}">
+                    <a16:creationId xmlns:a16="http://schemas.microsoft.com/office/drawing/2014/main" id="{A68C3020-67DE-F21A-4369-DD4811D14C96}"/>
+                  </a:ext>
+                </a:extLst>
+              </p:cNvPr>
+              <p:cNvSpPr txBox="1"/>
+              <p:nvPr/>
+            </p:nvSpPr>
+            <p:spPr>
+              <a:xfrm>
+                <a:off x="857627" y="5514567"/>
+                <a:ext cx="3604260" cy="215444"/>
+              </a:xfrm>
+              <a:prstGeom prst="rect">
+                <a:avLst/>
+              </a:prstGeom>
+              <a:noFill/>
+            </p:spPr>
+            <p:txBody>
+              <a:bodyPr wrap="square" lIns="0" tIns="0" rIns="0" bIns="0" anchor="t">
+                <a:spAutoFit/>
+              </a:bodyPr>
+              <a:lstStyle/>
+              <a:p>
+                <a14:m>
+                  <m:oMath xmlns:m="http://schemas.openxmlformats.org/officeDocument/2006/math">
+                    <m:sSub>
+                      <m:sSubPr>
+                        <m:ctrlPr>
+                          <a:rPr lang="en-US" sz="1400" i="1" dirty="0" err="1" smtClean="0">
+                            <a:latin typeface="Cambria Math" panose="02040503050406030204" pitchFamily="18" charset="0"/>
+                          </a:rPr>
+                        </m:ctrlPr>
+                      </m:sSubPr>
+                      <m:e>
+                        <m:r>
+                          <a:rPr lang="en-US" sz="1400" i="1" dirty="0" err="1" smtClean="0">
+                            <a:latin typeface="Cambria Math" panose="02040503050406030204" pitchFamily="18" charset="0"/>
+                          </a:rPr>
+                          <m:t>𝑅</m:t>
+                        </m:r>
+                      </m:e>
+                      <m:sub>
+                        <m:r>
+                          <a:rPr lang="en-US" sz="1400" i="1" dirty="0" err="1" smtClean="0">
+                            <a:latin typeface="Cambria Math" panose="02040503050406030204" pitchFamily="18" charset="0"/>
+                          </a:rPr>
+                          <m:t>𝑏</m:t>
+                        </m:r>
+                      </m:sub>
+                    </m:sSub>
+                  </m:oMath>
+                </a14:m>
+                <a:r>
+                  <a:rPr lang="en-US" sz="1400" dirty="0">
+                    <a:latin typeface="Aptos" panose="020B0004020202020204" pitchFamily="34" charset="0"/>
+                  </a:rPr>
+                  <a:t>= bit rate</a:t>
+                </a:r>
+              </a:p>
+            </p:txBody>
+          </p:sp>
+        </mc:Choice>
+        <mc:Fallback>
+          <p:sp>
+            <p:nvSpPr>
+              <p:cNvPr id="18" name="TextBox 17">
+                <a:extLst>
+                  <a:ext uri="{FF2B5EF4-FFF2-40B4-BE49-F238E27FC236}">
+                    <a16:creationId xmlns:a16="http://schemas.microsoft.com/office/drawing/2014/main" id="{A68C3020-67DE-F21A-4369-DD4811D14C96}"/>
+                  </a:ext>
+                </a:extLst>
+              </p:cNvPr>
+              <p:cNvSpPr txBox="1">
+                <a:spLocks noRot="1" noChangeAspect="1" noMove="1" noResize="1" noEditPoints="1" noAdjustHandles="1" noChangeArrowheads="1" noChangeShapeType="1" noTextEdit="1"/>
+              </p:cNvSpPr>
+              <p:nvPr/>
+            </p:nvSpPr>
+            <p:spPr>
+              <a:xfrm>
+                <a:off x="857627" y="5514567"/>
+                <a:ext cx="3604260" cy="215444"/>
+              </a:xfrm>
+              <a:prstGeom prst="rect">
+                <a:avLst/>
+              </a:prstGeom>
+              <a:blipFill>
+                <a:blip r:embed="rId4"/>
+                <a:stretch>
+                  <a:fillRect l="-1692" t="-28571" b="-51429"/>
+                </a:stretch>
+              </a:blipFill>
+            </p:spPr>
+            <p:txBody>
+              <a:bodyPr/>
+              <a:lstStyle/>
+              <a:p>
+                <a:r>
+                  <a:rPr lang="en-US">
+                    <a:noFill/>
+                  </a:rPr>
+                  <a:t> </a:t>
+                </a:r>
+              </a:p>
+            </p:txBody>
+          </p:sp>
+        </mc:Fallback>
+      </mc:AlternateContent>
+      <mc:AlternateContent xmlns:mc="http://schemas.openxmlformats.org/markup-compatibility/2006">
+        <mc:Choice xmlns:a14="http://schemas.microsoft.com/office/drawing/2010/main" Requires="a14">
+          <p:sp>
+            <p:nvSpPr>
+              <p:cNvPr id="20" name="TextBox 19">
+                <a:extLst>
+                  <a:ext uri="{FF2B5EF4-FFF2-40B4-BE49-F238E27FC236}">
+                    <a16:creationId xmlns:a16="http://schemas.microsoft.com/office/drawing/2014/main" id="{2BB3439D-B684-68EF-2A7C-E6FA4DAE441B}"/>
+                  </a:ext>
+                </a:extLst>
+              </p:cNvPr>
+              <p:cNvSpPr txBox="1"/>
+              <p:nvPr/>
+            </p:nvSpPr>
+            <p:spPr>
+              <a:xfrm>
+                <a:off x="1648638" y="4659226"/>
+                <a:ext cx="1283098" cy="659540"/>
+              </a:xfrm>
+              <a:prstGeom prst="rect">
+                <a:avLst/>
+              </a:prstGeom>
+              <a:noFill/>
+            </p:spPr>
+            <p:txBody>
+              <a:bodyPr wrap="square">
+                <a:spAutoFit/>
+              </a:bodyPr>
+              <a:lstStyle/>
+              <a:p>
+                <a:pPr/>
+                <a14:m>
+                  <m:oMathPara xmlns:m="http://schemas.openxmlformats.org/officeDocument/2006/math">
+                    <m:oMath>
+                      <m:sSub>
+                        <m:sSubPr>
+                          <m:ctrlPr>
+                            <a:rPr lang="en-US" sz="1800" b="0" i="1" smtClean="0">
+                              <a:solidFill>
+                                <a:schemeClr val="tx1"/>
+                              </a:solidFill>
+                              <a:latin typeface="Cambria Math" panose="02040503050406030204" pitchFamily="18" charset="0"/>
+                            </a:rPr>
+                          </m:ctrlPr>
+                        </m:sSubPr>
+                        <m:e>
+                          <m:r>
+                            <m:rPr>
+                              <m:sty m:val="p"/>
+                            </m:rPr>
+                            <a:rPr lang="en-US" sz="1800" b="0" i="1" smtClean="0">
+                              <a:solidFill>
+                                <a:schemeClr val="tx1"/>
+                              </a:solidFill>
+                              <a:latin typeface="Cambria Math" panose="02040503050406030204" pitchFamily="18" charset="0"/>
+                            </a:rPr>
+                            <m:t>T</m:t>
+                          </m:r>
+                        </m:e>
+                        <m:sub>
+                          <m:r>
+                            <m:rPr>
+                              <m:sty m:val="p"/>
+                            </m:rPr>
+                            <a:rPr lang="en-US" sz="1800" b="0" i="1" smtClean="0">
+                              <a:solidFill>
+                                <a:schemeClr val="tx1"/>
+                              </a:solidFill>
+                              <a:latin typeface="Cambria Math" panose="02040503050406030204" pitchFamily="18" charset="0"/>
+                            </a:rPr>
+                            <m:t>b</m:t>
+                          </m:r>
+                        </m:sub>
+                      </m:sSub>
+                      <m:r>
+                        <a:rPr lang="ar-AE" sz="1800" b="0" i="1" smtClean="0">
+                          <a:solidFill>
+                            <a:schemeClr val="tx1"/>
+                          </a:solidFill>
+                          <a:latin typeface="Cambria Math" panose="02040503050406030204" pitchFamily="18" charset="0"/>
+                        </a:rPr>
+                        <m:t>=</m:t>
+                      </m:r>
+                      <m:f>
+                        <m:fPr>
+                          <m:ctrlPr>
+                            <a:rPr lang="ar-AE" sz="1800" b="0" i="1" smtClean="0">
+                              <a:solidFill>
+                                <a:schemeClr val="tx1"/>
+                              </a:solidFill>
+                              <a:latin typeface="Cambria Math" panose="02040503050406030204" pitchFamily="18" charset="0"/>
+                            </a:rPr>
+                          </m:ctrlPr>
+                        </m:fPr>
+                        <m:num>
+                          <m:r>
+                            <a:rPr lang="ar-AE" sz="1800" b="0" i="1" smtClean="0">
+                              <a:solidFill>
+                                <a:schemeClr val="tx1"/>
+                              </a:solidFill>
+                              <a:latin typeface="Cambria Math" panose="02040503050406030204" pitchFamily="18" charset="0"/>
+                            </a:rPr>
+                            <m:t>1</m:t>
+                          </m:r>
+                        </m:num>
+                        <m:den>
+                          <m:sSub>
+                            <m:sSubPr>
+                              <m:ctrlPr>
+                                <a:rPr lang="en-US" sz="1800" b="0" i="1" smtClean="0">
+                                  <a:solidFill>
+                                    <a:schemeClr val="tx1"/>
+                                  </a:solidFill>
+                                  <a:latin typeface="Cambria Math" panose="02040503050406030204" pitchFamily="18" charset="0"/>
+                                </a:rPr>
+                              </m:ctrlPr>
+                            </m:sSubPr>
+                            <m:e>
+                              <m:r>
+                                <m:rPr>
+                                  <m:sty m:val="p"/>
+                                </m:rPr>
+                                <a:rPr lang="en-US" sz="1800" b="0" i="1" smtClean="0">
+                                  <a:solidFill>
+                                    <a:schemeClr val="tx1"/>
+                                  </a:solidFill>
+                                  <a:latin typeface="Cambria Math" panose="02040503050406030204" pitchFamily="18" charset="0"/>
+                                </a:rPr>
+                                <m:t>R</m:t>
+                              </m:r>
+                            </m:e>
+                            <m:sub>
+                              <m:r>
+                                <m:rPr>
+                                  <m:sty m:val="p"/>
+                                </m:rPr>
+                                <a:rPr lang="en-US" sz="1800" b="0" i="1" smtClean="0">
+                                  <a:solidFill>
+                                    <a:schemeClr val="tx1"/>
+                                  </a:solidFill>
+                                  <a:latin typeface="Cambria Math" panose="02040503050406030204" pitchFamily="18" charset="0"/>
+                                </a:rPr>
+                                <m:t>b</m:t>
+                              </m:r>
+                            </m:sub>
+                          </m:sSub>
+                        </m:den>
+                      </m:f>
+                    </m:oMath>
+                  </m:oMathPara>
+                </a14:m>
+                <a:endParaRPr lang="en-US" dirty="0"/>
+              </a:p>
+            </p:txBody>
+          </p:sp>
+        </mc:Choice>
+        <mc:Fallback>
+          <p:sp>
+            <p:nvSpPr>
+              <p:cNvPr id="20" name="TextBox 19">
+                <a:extLst>
+                  <a:ext uri="{FF2B5EF4-FFF2-40B4-BE49-F238E27FC236}">
+                    <a16:creationId xmlns:a16="http://schemas.microsoft.com/office/drawing/2014/main" id="{2BB3439D-B684-68EF-2A7C-E6FA4DAE441B}"/>
+                  </a:ext>
+                </a:extLst>
+              </p:cNvPr>
+              <p:cNvSpPr txBox="1">
+                <a:spLocks noRot="1" noChangeAspect="1" noMove="1" noResize="1" noEditPoints="1" noAdjustHandles="1" noChangeArrowheads="1" noChangeShapeType="1" noTextEdit="1"/>
+              </p:cNvSpPr>
+              <p:nvPr/>
+            </p:nvSpPr>
+            <p:spPr>
+              <a:xfrm>
+                <a:off x="1648638" y="4659226"/>
+                <a:ext cx="1283098" cy="659540"/>
+              </a:xfrm>
+              <a:prstGeom prst="rect">
+                <a:avLst/>
+              </a:prstGeom>
+              <a:blipFill>
+                <a:blip r:embed="rId5"/>
+                <a:stretch>
+                  <a:fillRect/>
+                </a:stretch>
+              </a:blipFill>
+            </p:spPr>
+            <p:txBody>
+              <a:bodyPr/>
+              <a:lstStyle/>
+              <a:p>
+                <a:r>
+                  <a:rPr lang="en-US">
+                    <a:noFill/>
+                  </a:rPr>
+                  <a:t> </a:t>
+                </a:r>
+              </a:p>
+            </p:txBody>
+          </p:sp>
+        </mc:Fallback>
+      </mc:AlternateContent>
+    </p:spTree>
+    <p:extLst>
+      <p:ext uri="{BB962C8B-B14F-4D97-AF65-F5344CB8AC3E}">
+        <p14:creationId xmlns:p14="http://schemas.microsoft.com/office/powerpoint/2010/main" val="3327458296"/>
+      </p:ext>
+    </p:extLst>
+  </p:cSld>
+  <p:clrMapOvr>
+    <a:masterClrMapping/>
+  </p:clrMapOvr>
+</p:sld>
+</file>
+
+<file path=ppt/slides/slide6.xml><?xml version="1.0" encoding="utf-8"?>
+<p:sld xmlns:a="http://schemas.openxmlformats.org/drawingml/2006/main" xmlns:r="http://schemas.openxmlformats.org/officeDocument/2006/relationships" xmlns:p="http://schemas.openxmlformats.org/presentationml/2006/main">
+  <p:cSld>
+    <p:bg>
+      <p:bgPr>
+        <a:solidFill>
+          <a:srgbClr val="F5F1E8"/>
+        </a:solidFill>
+        <a:effectLst/>
+      </p:bgPr>
+    </p:bg>
+    <p:spTree>
+      <p:nvGrpSpPr>
         <p:cNvPr id="1" name=""/>
         <p:cNvGrpSpPr/>
         <p:nvPr/>
@@ -9951,7 +11991,7 @@
 </p:sld>
 </file>
 
-<file path=ppt/slides/slide6.xml><?xml version="1.0" encoding="utf-8"?>
+<file path=ppt/slides/slide7.xml><?xml version="1.0" encoding="utf-8"?>
 <p:sld xmlns:a="http://schemas.openxmlformats.org/drawingml/2006/main" xmlns:r="http://schemas.openxmlformats.org/officeDocument/2006/relationships" xmlns:p="http://schemas.openxmlformats.org/presentationml/2006/main">
   <p:cSld>
     <p:bg>
@@ -10720,7 +12760,7 @@
 </p:sld>
 </file>
 
-<file path=ppt/slides/slide7.xml><?xml version="1.0" encoding="utf-8"?>
+<file path=ppt/slides/slide8.xml><?xml version="1.0" encoding="utf-8"?>
 <p:sld xmlns:a="http://schemas.openxmlformats.org/drawingml/2006/main" xmlns:r="http://schemas.openxmlformats.org/officeDocument/2006/relationships" xmlns:p="http://schemas.openxmlformats.org/presentationml/2006/main">
   <p:cSld>
     <p:bg>
@@ -11601,7 +13641,7 @@
 </p:sld>
 </file>
 
-<file path=ppt/slides/slide8.xml><?xml version="1.0" encoding="utf-8"?>
+<file path=ppt/slides/slide9.xml><?xml version="1.0" encoding="utf-8"?>
 <p:sld xmlns:a="http://schemas.openxmlformats.org/drawingml/2006/main" xmlns:r="http://schemas.openxmlformats.org/officeDocument/2006/relationships" xmlns:p="http://schemas.openxmlformats.org/presentationml/2006/main">
   <p:cSld>
     <p:bg>
@@ -12302,757 +14342,6 @@
     <p:extLst>
       <p:ext uri="{BB962C8B-B14F-4D97-AF65-F5344CB8AC3E}">
         <p14:creationId xmlns:p14="http://schemas.microsoft.com/office/powerpoint/2010/main" val="4154623093"/>
-      </p:ext>
-    </p:extLst>
-  </p:cSld>
-  <p:clrMapOvr>
-    <a:masterClrMapping/>
-  </p:clrMapOvr>
-</p:sld>
-</file>
-
-<file path=ppt/slides/slide9.xml><?xml version="1.0" encoding="utf-8"?>
-<p:sld xmlns:a="http://schemas.openxmlformats.org/drawingml/2006/main" xmlns:r="http://schemas.openxmlformats.org/officeDocument/2006/relationships" xmlns:p="http://schemas.openxmlformats.org/presentationml/2006/main">
-  <p:cSld>
-    <p:bg>
-      <p:bgPr>
-        <a:solidFill>
-          <a:srgbClr val="F5F1E8"/>
-        </a:solidFill>
-        <a:effectLst/>
-      </p:bgPr>
-    </p:bg>
-    <p:spTree>
-      <p:nvGrpSpPr>
-        <p:cNvPr id="1" name="">
-          <a:extLst>
-            <a:ext uri="{FF2B5EF4-FFF2-40B4-BE49-F238E27FC236}">
-              <a16:creationId xmlns:a16="http://schemas.microsoft.com/office/drawing/2014/main" id="{9938D679-40EE-965D-F59A-BE9808CC2CE2}"/>
-            </a:ext>
-          </a:extLst>
-        </p:cNvPr>
-        <p:cNvGrpSpPr/>
-        <p:nvPr/>
-      </p:nvGrpSpPr>
-      <p:grpSpPr>
-        <a:xfrm>
-          <a:off x="0" y="0"/>
-          <a:ext cx="0" cy="0"/>
-          <a:chOff x="0" y="0"/>
-          <a:chExt cx="0" cy="0"/>
-        </a:xfrm>
-      </p:grpSpPr>
-      <p:sp>
-        <p:nvSpPr>
-          <p:cNvPr id="2" name="Rectangle 1">
-            <a:extLst>
-              <a:ext uri="{FF2B5EF4-FFF2-40B4-BE49-F238E27FC236}">
-                <a16:creationId xmlns:a16="http://schemas.microsoft.com/office/drawing/2014/main" id="{2267E10D-8F26-54A6-088D-9EFEB6BBDB41}"/>
-              </a:ext>
-            </a:extLst>
-          </p:cNvPr>
-          <p:cNvSpPr/>
-          <p:nvPr/>
-        </p:nvSpPr>
-        <p:spPr>
-          <a:xfrm>
-            <a:off x="0" y="0"/>
-            <a:ext cx="164592" cy="6858000"/>
-          </a:xfrm>
-          <a:prstGeom prst="rect">
-            <a:avLst/>
-          </a:prstGeom>
-          <a:solidFill>
-            <a:srgbClr val="0F6D74"/>
-          </a:solidFill>
-          <a:ln>
-            <a:noFill/>
-          </a:ln>
-        </p:spPr>
-        <p:style>
-          <a:lnRef idx="1">
-            <a:schemeClr val="accent1"/>
-          </a:lnRef>
-          <a:fillRef idx="3">
-            <a:schemeClr val="accent1"/>
-          </a:fillRef>
-          <a:effectRef idx="2">
-            <a:schemeClr val="accent1"/>
-          </a:effectRef>
-          <a:fontRef idx="minor">
-            <a:schemeClr val="lt1"/>
-          </a:fontRef>
-        </p:style>
-        <p:txBody>
-          <a:bodyPr rtlCol="0" anchor="ctr"/>
-          <a:lstStyle/>
-          <a:p>
-            <a:pPr algn="ctr"/>
-            <a:endParaRPr/>
-          </a:p>
-        </p:txBody>
-      </p:sp>
-      <p:cxnSp>
-        <p:nvCxnSpPr>
-          <p:cNvPr id="3" name="Connector 2">
-            <a:extLst>
-              <a:ext uri="{FF2B5EF4-FFF2-40B4-BE49-F238E27FC236}">
-                <a16:creationId xmlns:a16="http://schemas.microsoft.com/office/drawing/2014/main" id="{4510518E-8FBB-76A1-F12F-17C124DFDDC4}"/>
-              </a:ext>
-            </a:extLst>
-          </p:cNvPr>
-          <p:cNvCxnSpPr/>
-          <p:nvPr/>
-        </p:nvCxnSpPr>
-        <p:spPr>
-          <a:xfrm>
-            <a:off x="10698480" y="384048"/>
-            <a:ext cx="960120" cy="0"/>
-          </a:xfrm>
-          <a:prstGeom prst="line">
-            <a:avLst/>
-          </a:prstGeom>
-          <a:ln w="8890">
-            <a:solidFill>
-              <a:srgbClr val="CCD1D0"/>
-            </a:solidFill>
-          </a:ln>
-        </p:spPr>
-        <p:style>
-          <a:lnRef idx="2">
-            <a:schemeClr val="accent1"/>
-          </a:lnRef>
-          <a:fillRef idx="0">
-            <a:schemeClr val="accent1"/>
-          </a:fillRef>
-          <a:effectRef idx="1">
-            <a:schemeClr val="accent1"/>
-          </a:effectRef>
-          <a:fontRef idx="minor">
-            <a:schemeClr val="tx1"/>
-          </a:fontRef>
-        </p:style>
-      </p:cxnSp>
-      <p:cxnSp>
-        <p:nvCxnSpPr>
-          <p:cNvPr id="4" name="Connector 3">
-            <a:extLst>
-              <a:ext uri="{FF2B5EF4-FFF2-40B4-BE49-F238E27FC236}">
-                <a16:creationId xmlns:a16="http://schemas.microsoft.com/office/drawing/2014/main" id="{288E5373-0C85-A83B-1338-A98B46BB66FC}"/>
-              </a:ext>
-            </a:extLst>
-          </p:cNvPr>
-          <p:cNvCxnSpPr/>
-          <p:nvPr/>
-        </p:nvCxnSpPr>
-        <p:spPr>
-          <a:xfrm>
-            <a:off x="10698480" y="521207"/>
-            <a:ext cx="850392" cy="0"/>
-          </a:xfrm>
-          <a:prstGeom prst="line">
-            <a:avLst/>
-          </a:prstGeom>
-          <a:ln w="8890">
-            <a:solidFill>
-              <a:srgbClr val="CCD1D0"/>
-            </a:solidFill>
-          </a:ln>
-        </p:spPr>
-        <p:style>
-          <a:lnRef idx="2">
-            <a:schemeClr val="accent1"/>
-          </a:lnRef>
-          <a:fillRef idx="0">
-            <a:schemeClr val="accent1"/>
-          </a:fillRef>
-          <a:effectRef idx="1">
-            <a:schemeClr val="accent1"/>
-          </a:effectRef>
-          <a:fontRef idx="minor">
-            <a:schemeClr val="tx1"/>
-          </a:fontRef>
-        </p:style>
-      </p:cxnSp>
-      <p:cxnSp>
-        <p:nvCxnSpPr>
-          <p:cNvPr id="5" name="Connector 4">
-            <a:extLst>
-              <a:ext uri="{FF2B5EF4-FFF2-40B4-BE49-F238E27FC236}">
-                <a16:creationId xmlns:a16="http://schemas.microsoft.com/office/drawing/2014/main" id="{9ABA06F0-AF46-74CF-20A7-7656E63093E8}"/>
-              </a:ext>
-            </a:extLst>
-          </p:cNvPr>
-          <p:cNvCxnSpPr/>
-          <p:nvPr/>
-        </p:nvCxnSpPr>
-        <p:spPr>
-          <a:xfrm>
-            <a:off x="10698480" y="658368"/>
-            <a:ext cx="740664" cy="0"/>
-          </a:xfrm>
-          <a:prstGeom prst="line">
-            <a:avLst/>
-          </a:prstGeom>
-          <a:ln w="8890">
-            <a:solidFill>
-              <a:srgbClr val="CCD1D0"/>
-            </a:solidFill>
-          </a:ln>
-        </p:spPr>
-        <p:style>
-          <a:lnRef idx="2">
-            <a:schemeClr val="accent1"/>
-          </a:lnRef>
-          <a:fillRef idx="0">
-            <a:schemeClr val="accent1"/>
-          </a:fillRef>
-          <a:effectRef idx="1">
-            <a:schemeClr val="accent1"/>
-          </a:effectRef>
-          <a:fontRef idx="minor">
-            <a:schemeClr val="tx1"/>
-          </a:fontRef>
-        </p:style>
-      </p:cxnSp>
-      <p:cxnSp>
-        <p:nvCxnSpPr>
-          <p:cNvPr id="6" name="Connector 5">
-            <a:extLst>
-              <a:ext uri="{FF2B5EF4-FFF2-40B4-BE49-F238E27FC236}">
-                <a16:creationId xmlns:a16="http://schemas.microsoft.com/office/drawing/2014/main" id="{0BF32833-7F79-40D4-69B0-FD66FC93C0B0}"/>
-              </a:ext>
-            </a:extLst>
-          </p:cNvPr>
-          <p:cNvCxnSpPr/>
-          <p:nvPr/>
-        </p:nvCxnSpPr>
-        <p:spPr>
-          <a:xfrm>
-            <a:off x="10698480" y="795527"/>
-            <a:ext cx="630936" cy="0"/>
-          </a:xfrm>
-          <a:prstGeom prst="line">
-            <a:avLst/>
-          </a:prstGeom>
-          <a:ln w="8890">
-            <a:solidFill>
-              <a:srgbClr val="CCD1D0"/>
-            </a:solidFill>
-          </a:ln>
-        </p:spPr>
-        <p:style>
-          <a:lnRef idx="2">
-            <a:schemeClr val="accent1"/>
-          </a:lnRef>
-          <a:fillRef idx="0">
-            <a:schemeClr val="accent1"/>
-          </a:fillRef>
-          <a:effectRef idx="1">
-            <a:schemeClr val="accent1"/>
-          </a:effectRef>
-          <a:fontRef idx="minor">
-            <a:schemeClr val="tx1"/>
-          </a:fontRef>
-        </p:style>
-      </p:cxnSp>
-      <p:cxnSp>
-        <p:nvCxnSpPr>
-          <p:cNvPr id="7" name="Connector 6">
-            <a:extLst>
-              <a:ext uri="{FF2B5EF4-FFF2-40B4-BE49-F238E27FC236}">
-                <a16:creationId xmlns:a16="http://schemas.microsoft.com/office/drawing/2014/main" id="{438FA707-30F5-FF28-2F1E-21268B08AC78}"/>
-              </a:ext>
-            </a:extLst>
-          </p:cNvPr>
-          <p:cNvCxnSpPr/>
-          <p:nvPr/>
-        </p:nvCxnSpPr>
-        <p:spPr>
-          <a:xfrm>
-            <a:off x="10698480" y="932688"/>
-            <a:ext cx="521208" cy="0"/>
-          </a:xfrm>
-          <a:prstGeom prst="line">
-            <a:avLst/>
-          </a:prstGeom>
-          <a:ln w="8890">
-            <a:solidFill>
-              <a:srgbClr val="CCD1D0"/>
-            </a:solidFill>
-          </a:ln>
-        </p:spPr>
-        <p:style>
-          <a:lnRef idx="2">
-            <a:schemeClr val="accent1"/>
-          </a:lnRef>
-          <a:fillRef idx="0">
-            <a:schemeClr val="accent1"/>
-          </a:fillRef>
-          <a:effectRef idx="1">
-            <a:schemeClr val="accent1"/>
-          </a:effectRef>
-          <a:fontRef idx="minor">
-            <a:schemeClr val="tx1"/>
-          </a:fontRef>
-        </p:style>
-      </p:cxnSp>
-      <p:sp>
-        <p:nvSpPr>
-          <p:cNvPr id="8" name="TextBox 7">
-            <a:extLst>
-              <a:ext uri="{FF2B5EF4-FFF2-40B4-BE49-F238E27FC236}">
-                <a16:creationId xmlns:a16="http://schemas.microsoft.com/office/drawing/2014/main" id="{04F1A740-3A2A-9D75-3509-B156B9960FC1}"/>
-              </a:ext>
-            </a:extLst>
-          </p:cNvPr>
-          <p:cNvSpPr txBox="1"/>
-          <p:nvPr/>
-        </p:nvSpPr>
-        <p:spPr>
-          <a:xfrm>
-            <a:off x="502920" y="6473952"/>
-            <a:ext cx="5029200" cy="182880"/>
-          </a:xfrm>
-          <a:prstGeom prst="rect">
-            <a:avLst/>
-          </a:prstGeom>
-          <a:noFill/>
-        </p:spPr>
-        <p:txBody>
-          <a:bodyPr wrap="square" lIns="0" tIns="0" rIns="0" bIns="0" anchor="t">
-            <a:spAutoFit/>
-          </a:bodyPr>
-          <a:lstStyle/>
-          <a:p>
-            <a:pPr algn="l"/>
-            <a:r>
-              <a:rPr sz="850" b="1" i="0">
-                <a:solidFill>
-                  <a:srgbClr val="5F6B73"/>
-                </a:solidFill>
-                <a:latin typeface="Aptos"/>
-              </a:rPr>
-              <a:t>LECTURE 16 | FILTERS CLOCK RECOVERY PLLS </a:t>
-            </a:r>
-          </a:p>
-        </p:txBody>
-      </p:sp>
-      <p:sp>
-        <p:nvSpPr>
-          <p:cNvPr id="9" name="TextBox 8">
-            <a:extLst>
-              <a:ext uri="{FF2B5EF4-FFF2-40B4-BE49-F238E27FC236}">
-                <a16:creationId xmlns:a16="http://schemas.microsoft.com/office/drawing/2014/main" id="{08C5DB6F-D7CB-C2C2-F413-DB0EF992E5DF}"/>
-              </a:ext>
-            </a:extLst>
-          </p:cNvPr>
-          <p:cNvSpPr txBox="1"/>
-          <p:nvPr/>
-        </p:nvSpPr>
-        <p:spPr>
-          <a:xfrm>
-            <a:off x="11018520" y="6419088"/>
-            <a:ext cx="594360" cy="228600"/>
-          </a:xfrm>
-          <a:prstGeom prst="rect">
-            <a:avLst/>
-          </a:prstGeom>
-          <a:noFill/>
-        </p:spPr>
-        <p:txBody>
-          <a:bodyPr wrap="square" lIns="0" tIns="0" rIns="0" bIns="0" anchor="t">
-            <a:spAutoFit/>
-          </a:bodyPr>
-          <a:lstStyle/>
-          <a:p>
-            <a:pPr algn="r"/>
-            <a:r>
-              <a:rPr sz="1000" b="1" i="0">
-                <a:solidFill>
-                  <a:srgbClr val="5F6B73"/>
-                </a:solidFill>
-                <a:latin typeface="Aptos"/>
-              </a:rPr>
-              <a:t>04</a:t>
-            </a:r>
-          </a:p>
-        </p:txBody>
-      </p:sp>
-      <p:sp>
-        <p:nvSpPr>
-          <p:cNvPr id="10" name="TextBox 9">
-            <a:extLst>
-              <a:ext uri="{FF2B5EF4-FFF2-40B4-BE49-F238E27FC236}">
-                <a16:creationId xmlns:a16="http://schemas.microsoft.com/office/drawing/2014/main" id="{8460ABA2-F930-9E2D-E657-DCAFBFB4E4B9}"/>
-              </a:ext>
-            </a:extLst>
-          </p:cNvPr>
-          <p:cNvSpPr txBox="1"/>
-          <p:nvPr/>
-        </p:nvSpPr>
-        <p:spPr>
-          <a:xfrm>
-            <a:off x="621792" y="384048"/>
-            <a:ext cx="10881360" cy="292608"/>
-          </a:xfrm>
-          <a:prstGeom prst="rect">
-            <a:avLst/>
-          </a:prstGeom>
-          <a:noFill/>
-        </p:spPr>
-        <p:txBody>
-          <a:bodyPr wrap="square" lIns="0" tIns="0" rIns="0" bIns="0" anchor="t">
-            <a:spAutoFit/>
-          </a:bodyPr>
-          <a:lstStyle/>
-          <a:p>
-            <a:pPr algn="l"/>
-            <a:r>
-              <a:rPr sz="1050" b="1" i="0">
-                <a:solidFill>
-                  <a:srgbClr val="0F6D74"/>
-                </a:solidFill>
-                <a:latin typeface="Aptos"/>
-              </a:rPr>
-              <a:t>WORKING VOCABULARY</a:t>
-            </a:r>
-          </a:p>
-        </p:txBody>
-      </p:sp>
-      <p:sp>
-        <p:nvSpPr>
-          <p:cNvPr id="11" name="TextBox 10">
-            <a:extLst>
-              <a:ext uri="{FF2B5EF4-FFF2-40B4-BE49-F238E27FC236}">
-                <a16:creationId xmlns:a16="http://schemas.microsoft.com/office/drawing/2014/main" id="{D55D189E-A2E0-365D-C338-3F529611DA46}"/>
-              </a:ext>
-            </a:extLst>
-          </p:cNvPr>
-          <p:cNvSpPr txBox="1"/>
-          <p:nvPr/>
-        </p:nvSpPr>
-        <p:spPr>
-          <a:xfrm>
-            <a:off x="594360" y="749808"/>
-            <a:ext cx="10881360" cy="446276"/>
-          </a:xfrm>
-          <a:prstGeom prst="rect">
-            <a:avLst/>
-          </a:prstGeom>
-          <a:noFill/>
-        </p:spPr>
-        <p:txBody>
-          <a:bodyPr wrap="square" lIns="0" tIns="0" rIns="0" bIns="0" anchor="t">
-            <a:spAutoFit/>
-          </a:bodyPr>
-          <a:lstStyle/>
-          <a:p>
-            <a:r>
-              <a:rPr lang="en-US" sz="2900" b="1" dirty="0">
-                <a:solidFill>
-                  <a:srgbClr val="17324D"/>
-                </a:solidFill>
-                <a:latin typeface="Aptos Display"/>
-              </a:rPr>
-              <a:t>Continually Correct the Timing</a:t>
-            </a:r>
-          </a:p>
-        </p:txBody>
-      </p:sp>
-      <p:cxnSp>
-        <p:nvCxnSpPr>
-          <p:cNvPr id="12" name="Connector 11">
-            <a:extLst>
-              <a:ext uri="{FF2B5EF4-FFF2-40B4-BE49-F238E27FC236}">
-                <a16:creationId xmlns:a16="http://schemas.microsoft.com/office/drawing/2014/main" id="{47C30894-5AC6-783B-7713-9C50CBE8BFBE}"/>
-              </a:ext>
-            </a:extLst>
-          </p:cNvPr>
-          <p:cNvCxnSpPr/>
-          <p:nvPr/>
-        </p:nvCxnSpPr>
-        <p:spPr>
-          <a:xfrm>
-            <a:off x="612648" y="1444752"/>
-            <a:ext cx="1143000" cy="0"/>
-          </a:xfrm>
-          <a:prstGeom prst="line">
-            <a:avLst/>
-          </a:prstGeom>
-          <a:ln w="38100">
-            <a:solidFill>
-              <a:srgbClr val="D96F32"/>
-            </a:solidFill>
-          </a:ln>
-        </p:spPr>
-        <p:style>
-          <a:lnRef idx="2">
-            <a:schemeClr val="accent1"/>
-          </a:lnRef>
-          <a:fillRef idx="0">
-            <a:schemeClr val="accent1"/>
-          </a:fillRef>
-          <a:effectRef idx="1">
-            <a:schemeClr val="accent1"/>
-          </a:effectRef>
-          <a:fontRef idx="minor">
-            <a:schemeClr val="tx1"/>
-          </a:fontRef>
-        </p:style>
-      </p:cxnSp>
-      <p:sp>
-        <p:nvSpPr>
-          <p:cNvPr id="37" name="Rounded Rectangle 20">
-            <a:extLst>
-              <a:ext uri="{FF2B5EF4-FFF2-40B4-BE49-F238E27FC236}">
-                <a16:creationId xmlns:a16="http://schemas.microsoft.com/office/drawing/2014/main" id="{48C18269-1309-0765-1B54-65076A1139DF}"/>
-              </a:ext>
-            </a:extLst>
-          </p:cNvPr>
-          <p:cNvSpPr/>
-          <p:nvPr/>
-        </p:nvSpPr>
-        <p:spPr>
-          <a:xfrm>
-            <a:off x="629027" y="1828801"/>
-            <a:ext cx="3832860" cy="1795714"/>
-          </a:xfrm>
-          <a:prstGeom prst="roundRect">
-            <a:avLst/>
-          </a:prstGeom>
-          <a:solidFill>
-            <a:srgbClr val="F4E3D8"/>
-          </a:solidFill>
-          <a:ln w="10160">
-            <a:solidFill>
-              <a:srgbClr val="CCD1D0"/>
-            </a:solidFill>
-          </a:ln>
-        </p:spPr>
-        <p:style>
-          <a:lnRef idx="1">
-            <a:schemeClr val="accent1"/>
-          </a:lnRef>
-          <a:fillRef idx="3">
-            <a:schemeClr val="accent1"/>
-          </a:fillRef>
-          <a:effectRef idx="2">
-            <a:schemeClr val="accent1"/>
-          </a:effectRef>
-          <a:fontRef idx="minor">
-            <a:schemeClr val="lt1"/>
-          </a:fontRef>
-        </p:style>
-        <p:txBody>
-          <a:bodyPr rtlCol="0" anchor="ctr"/>
-          <a:lstStyle/>
-          <a:p>
-            <a:pPr algn="ctr"/>
-            <a:endParaRPr/>
-          </a:p>
-        </p:txBody>
-      </p:sp>
-      <p:sp>
-        <p:nvSpPr>
-          <p:cNvPr id="39" name="Rectangle 38">
-            <a:extLst>
-              <a:ext uri="{FF2B5EF4-FFF2-40B4-BE49-F238E27FC236}">
-                <a16:creationId xmlns:a16="http://schemas.microsoft.com/office/drawing/2014/main" id="{82759087-4168-5DBE-E2E9-D77F026F1F84}"/>
-              </a:ext>
-            </a:extLst>
-          </p:cNvPr>
-          <p:cNvSpPr/>
-          <p:nvPr/>
-        </p:nvSpPr>
-        <p:spPr>
-          <a:xfrm>
-            <a:off x="629026" y="1828801"/>
-            <a:ext cx="96267" cy="1795714"/>
-          </a:xfrm>
-          <a:prstGeom prst="rect">
-            <a:avLst/>
-          </a:prstGeom>
-          <a:solidFill>
-            <a:srgbClr val="D96F32"/>
-          </a:solidFill>
-          <a:ln>
-            <a:noFill/>
-          </a:ln>
-        </p:spPr>
-        <p:style>
-          <a:lnRef idx="1">
-            <a:schemeClr val="accent1"/>
-          </a:lnRef>
-          <a:fillRef idx="3">
-            <a:schemeClr val="accent1"/>
-          </a:fillRef>
-          <a:effectRef idx="2">
-            <a:schemeClr val="accent1"/>
-          </a:effectRef>
-          <a:fontRef idx="minor">
-            <a:schemeClr val="lt1"/>
-          </a:fontRef>
-        </p:style>
-        <p:txBody>
-          <a:bodyPr rtlCol="0" anchor="ctr"/>
-          <a:lstStyle/>
-          <a:p>
-            <a:pPr algn="ctr"/>
-            <a:endParaRPr/>
-          </a:p>
-        </p:txBody>
-      </p:sp>
-      <p:sp>
-        <p:nvSpPr>
-          <p:cNvPr id="43" name="TextBox 42">
-            <a:extLst>
-              <a:ext uri="{FF2B5EF4-FFF2-40B4-BE49-F238E27FC236}">
-                <a16:creationId xmlns:a16="http://schemas.microsoft.com/office/drawing/2014/main" id="{72244908-E82A-09BA-C362-A8231EDBA5CD}"/>
-              </a:ext>
-            </a:extLst>
-          </p:cNvPr>
-          <p:cNvSpPr txBox="1"/>
-          <p:nvPr/>
-        </p:nvSpPr>
-        <p:spPr>
-          <a:xfrm>
-            <a:off x="857627" y="2432304"/>
-            <a:ext cx="3282294" cy="923330"/>
-          </a:xfrm>
-          <a:prstGeom prst="rect">
-            <a:avLst/>
-          </a:prstGeom>
-          <a:noFill/>
-        </p:spPr>
-        <p:txBody>
-          <a:bodyPr wrap="square" lIns="0" tIns="0" rIns="0" bIns="0" anchor="t">
-            <a:spAutoFit/>
-          </a:bodyPr>
-          <a:lstStyle/>
-          <a:p>
-            <a:pPr marL="0" lvl="1"/>
-            <a:r>
-              <a:rPr lang="en-US" sz="2000" dirty="0">
-                <a:latin typeface="Aptos" panose="020B0004020202020204" pitchFamily="34" charset="0"/>
-              </a:rPr>
-              <a:t>Encode the data so that long sequences without transitions are avoided.</a:t>
-            </a:r>
-          </a:p>
-        </p:txBody>
-      </p:sp>
-      <p:pic>
-        <p:nvPicPr>
-          <p:cNvPr id="14" name="Picture 13">
-            <a:extLst>
-              <a:ext uri="{FF2B5EF4-FFF2-40B4-BE49-F238E27FC236}">
-                <a16:creationId xmlns:a16="http://schemas.microsoft.com/office/drawing/2014/main" id="{DEF44552-CF79-173F-CC62-AB375D58CA65}"/>
-              </a:ext>
-            </a:extLst>
-          </p:cNvPr>
-          <p:cNvPicPr>
-            <a:picLocks noChangeAspect="1"/>
-          </p:cNvPicPr>
-          <p:nvPr/>
-        </p:nvPicPr>
-        <p:blipFill>
-          <a:blip r:embed="rId3">
-            <a:extLst>
-              <a:ext uri="{28A0092B-C50C-407E-A947-70E740481C1C}">
-                <a14:useLocalDpi xmlns:a14="http://schemas.microsoft.com/office/drawing/2010/main" val="0"/>
-              </a:ext>
-            </a:extLst>
-          </a:blip>
-          <a:stretch>
-            <a:fillRect/>
-          </a:stretch>
-        </p:blipFill>
-        <p:spPr>
-          <a:xfrm>
-            <a:off x="6472227" y="0"/>
-            <a:ext cx="4691743" cy="6858000"/>
-          </a:xfrm>
-          <a:prstGeom prst="rect">
-            <a:avLst/>
-          </a:prstGeom>
-        </p:spPr>
-      </p:pic>
-      <p:sp>
-        <p:nvSpPr>
-          <p:cNvPr id="17" name="TextBox 16">
-            <a:extLst>
-              <a:ext uri="{FF2B5EF4-FFF2-40B4-BE49-F238E27FC236}">
-                <a16:creationId xmlns:a16="http://schemas.microsoft.com/office/drawing/2014/main" id="{727A4469-C8E1-F60C-789C-2D3024E82E93}"/>
-              </a:ext>
-            </a:extLst>
-          </p:cNvPr>
-          <p:cNvSpPr txBox="1"/>
-          <p:nvPr/>
-        </p:nvSpPr>
-        <p:spPr>
-          <a:xfrm>
-            <a:off x="857627" y="1993392"/>
-            <a:ext cx="3282294" cy="307777"/>
-          </a:xfrm>
-          <a:prstGeom prst="rect">
-            <a:avLst/>
-          </a:prstGeom>
-          <a:noFill/>
-        </p:spPr>
-        <p:txBody>
-          <a:bodyPr wrap="square" lIns="0" tIns="0" rIns="0" bIns="0" anchor="t">
-            <a:spAutoFit/>
-          </a:bodyPr>
-          <a:lstStyle/>
-          <a:p>
-            <a:pPr algn="l"/>
-            <a:r>
-              <a:rPr lang="en-US" sz="2000" b="1" dirty="0">
-                <a:solidFill>
-                  <a:srgbClr val="17324D"/>
-                </a:solidFill>
-                <a:latin typeface="Aptos"/>
-              </a:rPr>
-              <a:t>Run-Length Limiting (RLL)</a:t>
-            </a:r>
-          </a:p>
-        </p:txBody>
-      </p:sp>
-      <p:pic>
-        <p:nvPicPr>
-          <p:cNvPr id="19" name="Picture 18">
-            <a:extLst>
-              <a:ext uri="{FF2B5EF4-FFF2-40B4-BE49-F238E27FC236}">
-                <a16:creationId xmlns:a16="http://schemas.microsoft.com/office/drawing/2014/main" id="{3C30E154-A377-9048-15A4-4F9D62BDB51B}"/>
-              </a:ext>
-            </a:extLst>
-          </p:cNvPr>
-          <p:cNvPicPr>
-            <a:picLocks noChangeAspect="1"/>
-          </p:cNvPicPr>
-          <p:nvPr/>
-        </p:nvPicPr>
-        <p:blipFill>
-          <a:blip r:embed="rId4"/>
-          <a:srcRect/>
-          <a:stretch>
-            <a:fillRect/>
-          </a:stretch>
-        </p:blipFill>
-        <p:spPr>
-          <a:xfrm>
-            <a:off x="1101437" y="3888732"/>
-            <a:ext cx="4365620" cy="2182810"/>
-          </a:xfrm>
-          <a:prstGeom prst="rect">
-            <a:avLst/>
-          </a:prstGeom>
-        </p:spPr>
-      </p:pic>
-    </p:spTree>
-    <p:extLst>
-      <p:ext uri="{BB962C8B-B14F-4D97-AF65-F5344CB8AC3E}">
-        <p14:creationId xmlns:p14="http://schemas.microsoft.com/office/powerpoint/2010/main" val="3613530828"/>
       </p:ext>
     </p:extLst>
   </p:cSld>
